--- a/presentations/PR_L11_SearchingAndSorting_Lesson.pptx
+++ b/presentations/PR_L11_SearchingAndSorting_Lesson.pptx
@@ -2167,7 +2167,7 @@
                 <a:ea typeface="IBM Plex Sans" pitchFamily="34" charset="-122"/>
                 <a:cs typeface="IBM Plex Sans" pitchFamily="34" charset="-120"/>
               </a:rPr>
-              <a:t>You met these algorithms in topic 2.1 and traced them on paper. Now you will write them. At the sorting depot every search and every sort is yours to code, not just to describe.</a:t>
+              <a:t>You met these algorithms in topic 2.1 and traced them on paper. Now you will write them. Work through the six stations and every search and every sort is yours to code, not just to describe.</a:t>
             </a:r>
             <a:endParaRPr lang="en-US" sz="1800" dirty="0"/>
           </a:p>
@@ -2593,7 +2593,7 @@
                 <a:ea typeface="IBM Plex Sans" pitchFamily="34" charset="-122"/>
                 <a:cs typeface="IBM Plex Sans" pitchFamily="34" charset="-120"/>
               </a:rPr>
-              <a:t>A binary search needs sorted data, so sort the list first and search it afterwards.</a:t>
+              <a:t>Write the search or the sort out yourself, since sorted() and .index() hide the very steps being counted.</a:t>
             </a:r>
             <a:endParaRPr lang="en-US" sz="1700" dirty="0"/>
           </a:p>
@@ -2617,7 +2617,7 @@
                 <a:ea typeface="IBM Plex Sans" pitchFamily="34" charset="-122"/>
                 <a:cs typeface="IBM Plex Sans" pitchFamily="34" charset="-120"/>
               </a:rPr>
-              <a:t>Common mistake: binary searching an unsorted list, which quietly gives the wrong answer.</a:t>
+              <a:t>Common mistake: binary searching a list that was never sorted, which quietly gives the wrong answer.</a:t>
             </a:r>
             <a:endParaRPr lang="en-US" sz="1700" dirty="0"/>
           </a:p>
@@ -2805,7 +2805,7 @@
                 <a:ea typeface="IBM Plex Sans" pitchFamily="34" charset="-122"/>
                 <a:cs typeface="IBM Plex Sans" pitchFamily="34" charset="-120"/>
               </a:rPr>
-              <a:t>Sorting costs time too, so for one single search a linear search of unsorted data can still win.</a:t>
+              <a:t>Sorting costs time too, so for one single search on unsorted data the winner can still be a...</a:t>
             </a:r>
             <a:endParaRPr lang="en-US" sz="1600" dirty="0"/>
           </a:p>
@@ -3104,7 +3104,7 @@
                 <a:ea typeface="IBM Plex Sans" pitchFamily="34" charset="-122"/>
                 <a:cs typeface="IBM Plex Sans" pitchFamily="34" charset="-120"/>
               </a:rPr>
-              <a:t>Eight descriptions have arrived at the depot. Tap the star and sort each one into the algorithm it describes.</a:t>
+              <a:t>Eight descriptions are laid out on the floor below you. Tap the star and sort each one into the algorithm it describes.</a:t>
             </a:r>
             <a:endParaRPr lang="en-US" sz="2200" dirty="0"/>
           </a:p>
@@ -3459,7 +3459,7 @@
                 <a:ea typeface="IBM Plex Sans" pitchFamily="34" charset="-122"/>
                 <a:cs typeface="IBM Plex Sans" pitchFamily="34" charset="-120"/>
               </a:rPr>
-              <a:t>A flag set to False before the loop is the tidiest way to report 'not found' exactly once.</a:t>
+              <a:t>A flag set to False before the loop is the tidiest way to report 'not found' exactly once. The position a search finds is useful in itself: it reads the matching item out of a second list filled in the same order.</a:t>
             </a:r>
             <a:endParaRPr lang="en-US" sz="1300" dirty="0"/>
           </a:p>
@@ -3783,7 +3783,7 @@
                 <a:ea typeface="IBM Plex Sans" pitchFamily="34" charset="-122"/>
                 <a:cs typeface="IBM Plex Sans" pitchFamily="34" charset="-120"/>
               </a:rPr>
-              <a:t>On a list that is almost in order an insertion sort is very quick, because hardly anything has to move.</a:t>
+              <a:t>On a list that is almost in order an insertion sort is very quick, because hardly anything has to move. The same code sorts words as well as numbers, because &gt; compares two strings by character code.</a:t>
             </a:r>
             <a:endParaRPr lang="en-US" sz="1300" dirty="0"/>
           </a:p>
@@ -4060,7 +4060,7 @@
                 <a:ea typeface="IBM Plex Sans" pitchFamily="34" charset="-122"/>
                 <a:cs typeface="IBM Plex Sans" pitchFamily="34" charset="-120"/>
               </a:rPr>
-              <a:t>A linear search prints Not found from inside its loop, so searching one list prints that message several times. State where the message should go instead, and explain why putting it there fixes the problem.</a:t>
+              <a:t>A linear search prints Not found from inside its loop, so one search prints that message several times. State where the message should go instead, and explain why putting it there fixes the problem.</a:t>
             </a:r>
             <a:endParaRPr lang="en-US" sz="1700" dirty="0"/>
           </a:p>
@@ -4190,7 +4190,7 @@
                 <a:ea typeface="IBM Plex Sans" pitchFamily="34" charset="-122"/>
                 <a:cs typeface="IBM Plex Sans" pitchFamily="34" charset="-120"/>
               </a:rPr>
-              <a:t>Write a program that reads 8 whole numbers into a list, puts them in order using a bubble sort, and prints the sorted list.</a:t>
+              <a:t>Write a program that reads eight whole numbers into a list, puts them in order smallest first with a bubble sort of your own, and prints the sorted list on one line.</a:t>
             </a:r>
             <a:endParaRPr lang="en-US" sz="1700" dirty="0"/>
           </a:p>
@@ -4320,7 +4320,7 @@
                 <a:ea typeface="IBM Plex Sans" pitchFamily="34" charset="-122"/>
                 <a:cs typeface="IBM Plex Sans" pitchFamily="34" charset="-120"/>
               </a:rPr>
-              <a:t>Write a program that uses a binary search to look for a membership number the user types in, within a list of 10 numbers already in order, and prints its position or Not found.</a:t>
+              <a:t>Write a program that reads a whole number and finds it in a list of ten numbers that is already in order, using a binary search, and prints its position or Not found.</a:t>
             </a:r>
             <a:endParaRPr lang="en-US" sz="1700" dirty="0"/>
           </a:p>
@@ -5726,7 +5726,7 @@
                 <a:ea typeface="IBM Plex Sans" pitchFamily="34" charset="-122"/>
                 <a:cs typeface="IBM Plex Sans" pitchFamily="34" charset="-120"/>
               </a:rPr>
-              <a:t>Know how to code a linear search and a binary search</a:t>
+              <a:t>Know how to code a linear search and a binary search, and report the position each one finds</a:t>
             </a:r>
             <a:endParaRPr lang="en-US" sz="1900" dirty="0"/>
           </a:p>
@@ -5922,7 +5922,7 @@
                 <a:ea typeface="IBM Plex Sans" pitchFamily="34" charset="-122"/>
                 <a:cs typeface="IBM Plex Sans" pitchFamily="34" charset="-120"/>
               </a:rPr>
-              <a:t>Know why a binary search needs its list to be in order before it starts</a:t>
+              <a:t>Know how to count the comparisons an algorithm makes, in order to compare two of them</a:t>
             </a:r>
             <a:endParaRPr lang="en-US" sz="1900" dirty="0"/>
           </a:p>
@@ -6590,7 +6590,7 @@
                 <a:ea typeface="IBM Plex Sans" pitchFamily="34" charset="-122"/>
                 <a:cs typeface="IBM Plex Sans" pitchFamily="34" charset="-120"/>
               </a:rPr>
-              <a:t>The sorted list holds 3, 8, 12, 19, 24, 31, 40. Write down the item a binary search looks at first, second and third while hunting for 31, and how many comparisons that took.</a:t>
+              <a:t>The sorted list holds 3, 8, 12, 19, 24, 31, 40. Write down the value a binary search looks at first, second and third while it hunts for 40, and how many comparisons that took.</a:t>
             </a:r>
             <a:endParaRPr lang="en-US" sz="2600" dirty="0"/>
           </a:p>
@@ -7961,7 +7961,7 @@
                 <a:ea typeface="IBM Plex Sans" pitchFamily="34" charset="-122"/>
                 <a:cs typeface="IBM Plex Sans" pitchFamily="34" charset="-120"/>
               </a:rPr>
-              <a:t>A linear search over a million items may need a million comparisons, which is why sorted data is worth having.</a:t>
+              <a:t>A linear search over a million items may need a million comparisons, which is why sorted data is...</a:t>
             </a:r>
             <a:endParaRPr lang="en-US" sz="1600" dirty="0"/>
           </a:p>
@@ -8537,7 +8537,7 @@
                 <a:ea typeface="IBM Plex Sans" pitchFamily="34" charset="-122"/>
                 <a:cs typeface="IBM Plex Sans" pitchFamily="34" charset="-120"/>
               </a:rPr>
-              <a:t>Doubling the list adds only one more comparison, so a million items need about twenty.</a:t>
+              <a:t>Doubling the length of the list adds only one more comparison, so a million items need about...</a:t>
             </a:r>
             <a:endParaRPr lang="en-US" sz="1600" dirty="0"/>
           </a:p>
@@ -9113,7 +9113,7 @@
                 <a:ea typeface="IBM Plex Sans" pitchFamily="34" charset="-122"/>
                 <a:cs typeface="IBM Plex Sans" pitchFamily="34" charset="-120"/>
               </a:rPr>
-              <a:t>A whole pass with no swaps at all means the list is already in order, so the sort can stop there.</a:t>
+              <a:t>A whole pass that makes no swaps at all means the list is already in order, so the sort can...</a:t>
             </a:r>
             <a:endParaRPr lang="en-US" sz="1600" dirty="0"/>
           </a:p>
@@ -9689,7 +9689,7 @@
                 <a:ea typeface="IBM Plex Sans" pitchFamily="34" charset="-122"/>
                 <a:cs typeface="IBM Plex Sans" pitchFamily="34" charset="-120"/>
               </a:rPr>
-              <a:t>An insertion sort is how most people sort a hand of cards without ever being taught to.</a:t>
+              <a:t>An insertion sort is how most people put a hand of cards in order without ever being...</a:t>
             </a:r>
             <a:endParaRPr lang="en-US" sz="1600" dirty="0"/>
           </a:p>
@@ -10265,7 +10265,7 @@
                 <a:ea typeface="IBM Plex Sans" pitchFamily="34" charset="-122"/>
                 <a:cs typeface="IBM Plex Sans" pitchFamily="34" charset="-120"/>
               </a:rPr>
-              <a:t>A merge sort usually beats a bubble sort, but it needs extra memory to hold the pieces.</a:t>
+              <a:t>A merge sort usually beats a bubble sort on a long list, but what it costs you is extra...</a:t>
             </a:r>
             <a:endParaRPr lang="en-US" sz="1600" dirty="0"/>
           </a:p>

--- a/presentations/PR_L11_SearchingAndSorting_Lesson.pptx
+++ b/presentations/PR_L11_SearchingAndSorting_Lesson.pptx
@@ -19,9 +19,10 @@
     <p:sldId id="267" r:id="rId13"/>
     <p:sldId id="268" r:id="rId14"/>
     <p:sldId id="269" r:id="rId15"/>
+    <p:sldId id="270" r:id="rId16"/>
   </p:sldIdLst>
   <p:notesMasterIdLst>
-    <p:notesMasterId r:id="rId16"/>
+    <p:notesMasterId r:id="rId17"/>
   </p:notesMasterIdLst>
   <p:sldSz cx="12192000" cy="6858000"/>
   <p:notesSz cx="6858000" cy="12192000"/>
@@ -692,7 +693,14 @@
           <a:p>
             <a:r>
               <a:rPr lang="en-US" dirty="0"/>
-              <a:t>Make them commit to an answer on paper before they tap the star. Guessing first costs them the learning.</a:t>
+              <a:t>The answer is B: [2, 4, 7]
+4.
+Do not say it yet. Every pupil commits first - fingers, whiteboards or a show of hands on each letter in turn - and you count the split before anyone can change their mind.
+IF MOST OF THE CLASS IS RIGHT: say why it is right in one sentence and go straight on to the independent work.
+IF A SIGNIFICANT GROUP IS ON ONE WRONG LETTER: that option is the misconception to teach against before anyone goes on. Go back to station 3, Bubble sort, and work through its example again, aloud, with the class watching, then re-ask this question.
+The course's own response to a wrong answer here: Four comparisons for three numbers. A bubble sort does far more comparisons than a search, which is why sorting costs so much more.
+A limitation, stated rather than papered over: one response covers every wrong option; it does not say what to revisit for each one. The course does not record what each separate wrong option means, and this slide does not invent it. Decide your own reteach for each option before the lesson; the options above are the start of it.
+This is a real activity from the experience (pr-l11-s3-c3), so the wording here is the wording a pupil will see.</a:t>
             </a:r>
             <a:endParaRPr lang="en-US" dirty="0"/>
           </a:p>
@@ -780,7 +788,7 @@
           <a:p>
             <a:r>
               <a:rPr lang="en-US" dirty="0"/>
-              <a:t>Use these as a settler, or as something for early finishers to read in the experience.</a:t>
+              <a:t>Make them commit to an answer on paper before they tap the star. Guessing first costs them the learning.</a:t>
             </a:r>
             <a:endParaRPr lang="en-US" dirty="0"/>
           </a:p>
@@ -868,7 +876,7 @@
           <a:p>
             <a:r>
               <a:rPr lang="en-US" dirty="0"/>
-              <a:t>Timed and silent. Mark against the answer sheet, then ask students to record their weakest area.</a:t>
+              <a:t>Use these as a settler, or as something for early finishers to read in the experience.</a:t>
             </a:r>
             <a:endParaRPr lang="en-US" dirty="0"/>
           </a:p>
@@ -956,7 +964,7 @@
           <a:p>
             <a:r>
               <a:rPr lang="en-US" dirty="0"/>
-              <a:t>Students copy their score-screen breakdown onto the worksheet, then rate themselves here.</a:t>
+              <a:t>Timed and silent. Mark against the answer sheet, then ask students to record their weakest area.</a:t>
             </a:r>
             <a:endParaRPr lang="en-US" dirty="0"/>
           </a:p>
@@ -980,6 +988,94 @@
             <a:fld id="{F7021451-1387-4CA6-816F-3879F97B5CBC}" type="slidenum">
               <a:rPr lang="en-US"/>
               <a:t>14</a:t>
+            </a:fld>
+            <a:endParaRPr lang="en-US"/>
+          </a:p>
+        </p:txBody>
+      </p:sp>
+    </p:spTree>
+    <p:extLst>
+      <p:ext uri="{BB962C8B-B14F-4D97-AF65-F5344CB8AC3E}">
+        <p14:creationId xmlns:p14="http://schemas.microsoft.com/office/powerpoint/2010/main" val="1024086991"/>
+      </p:ext>
+    </p:extLst>
+  </p:cSld>
+  <p:clrMapOvr>
+    <a:masterClrMapping/>
+  </p:clrMapOvr>
+</p:notes>
+</file>
+
+<file path=ppt/notesSlides/notesSlide15.xml><?xml version="1.0" encoding="utf-8"?>
+<p:notes xmlns:a="http://schemas.openxmlformats.org/drawingml/2006/main" xmlns:r="http://schemas.openxmlformats.org/officeDocument/2006/relationships" xmlns:p="http://schemas.openxmlformats.org/presentationml/2006/main">
+  <p:cSld>
+    <p:spTree>
+      <p:nvGrpSpPr>
+        <p:cNvPr id="1" name=""/>
+        <p:cNvGrpSpPr/>
+        <p:nvPr/>
+      </p:nvGrpSpPr>
+      <p:grpSpPr>
+        <a:xfrm>
+          <a:off x="0" y="0"/>
+          <a:ext cx="0" cy="0"/>
+          <a:chOff x="0" y="0"/>
+          <a:chExt cx="0" cy="0"/>
+        </a:xfrm>
+      </p:grpSpPr>
+      <p:sp>
+        <p:nvSpPr>
+          <p:cNvPr id="2" name="Slide Image Placeholder 1"/>
+          <p:cNvSpPr>
+            <a:spLocks noGrp="1" noRot="1" noChangeAspect="1"/>
+          </p:cNvSpPr>
+          <p:nvPr>
+            <p:ph type="sldImg"/>
+          </p:nvPr>
+        </p:nvSpPr>
+        <p:spPr/>
+      </p:sp>
+      <p:sp>
+        <p:nvSpPr>
+          <p:cNvPr id="3" name="Notes Placeholder 2"/>
+          <p:cNvSpPr>
+            <a:spLocks noGrp="1"/>
+          </p:cNvSpPr>
+          <p:nvPr>
+            <p:ph type="body" idx="1"/>
+          </p:nvPr>
+        </p:nvSpPr>
+        <p:spPr/>
+        <p:txBody>
+          <a:bodyPr/>
+          <a:lstStyle/>
+          <a:p>
+            <a:r>
+              <a:rPr lang="en-US" dirty="0"/>
+              <a:t>Students copy their score-screen breakdown onto the worksheet, then rate themselves here.</a:t>
+            </a:r>
+            <a:endParaRPr lang="en-US" dirty="0"/>
+          </a:p>
+        </p:txBody>
+      </p:sp>
+      <p:sp>
+        <p:nvSpPr>
+          <p:cNvPr id="4" name="Slide Number Placeholder 3"/>
+          <p:cNvSpPr>
+            <a:spLocks noGrp="1"/>
+          </p:cNvSpPr>
+          <p:nvPr>
+            <p:ph type="sldNum" sz="quarter" idx="10"/>
+          </p:nvPr>
+        </p:nvSpPr>
+        <p:spPr/>
+        <p:txBody>
+          <a:bodyPr/>
+          <a:lstStyle/>
+          <a:p>
+            <a:fld id="{F7021451-1387-4CA6-816F-3879F97B5CBC}" type="slidenum">
+              <a:rPr lang="en-US"/>
+              <a:t>15</a:t>
             </a:fld>
             <a:endParaRPr lang="en-US"/>
           </a:p>
@@ -2949,12 +3045,12 @@
         </p:nvSpPr>
         <p:spPr>
           <a:xfrm>
-            <a:off x="502920" y="438912"/>
-            <a:ext cx="3108960" cy="502920"/>
+            <a:off x="502920" y="457200"/>
+            <a:ext cx="1051560" cy="420624"/>
           </a:xfrm>
           <a:prstGeom prst="roundRect">
             <a:avLst>
-              <a:gd name="adj" fmla="val 18182"/>
+              <a:gd name="adj" fmla="val 21739"/>
             </a:avLst>
           </a:prstGeom>
           <a:solidFill>
@@ -2971,8 +3067,8 @@
         </p:nvSpPr>
         <p:spPr>
           <a:xfrm>
-            <a:off x="502920" y="438912"/>
-            <a:ext cx="3108960" cy="502920"/>
+            <a:off x="502920" y="457200"/>
+            <a:ext cx="1051560" cy="420624"/>
           </a:xfrm>
           <a:prstGeom prst="rect">
             <a:avLst/>
@@ -2988,7 +3084,7 @@
               <a:buNone/>
             </a:pPr>
             <a:r>
-              <a:rPr lang="en-US" sz="1300" b="1" dirty="0">
+              <a:rPr lang="en-US" sz="1200" b="1" dirty="0">
                 <a:solidFill>
                   <a:srgbClr val="101828"/>
                 </a:solidFill>
@@ -2996,9 +3092,9 @@
                 <a:ea typeface="IBM Plex Mono" pitchFamily="34" charset="-122"/>
                 <a:cs typeface="IBM Plex Mono" pitchFamily="34" charset="-120"/>
               </a:rPr>
-              <a:t>★  FINAL CHALLENGE</a:t>
-            </a:r>
-            <a:endParaRPr lang="en-US" sz="1300" dirty="0"/>
+              <a:t>CHECK</a:t>
+            </a:r>
+            <a:endParaRPr lang="en-US" sz="1200" dirty="0"/>
           </a:p>
         </p:txBody>
       </p:sp>
@@ -3010,8 +3106,8 @@
         </p:nvSpPr>
         <p:spPr>
           <a:xfrm>
-            <a:off x="502920" y="1097280"/>
-            <a:ext cx="11155680" cy="731520"/>
+            <a:off x="1737360" y="457200"/>
+            <a:ext cx="9875520" cy="420624"/>
           </a:xfrm>
           <a:prstGeom prst="rect">
             <a:avLst/>
@@ -3027,34 +3123,76 @@
               <a:buNone/>
             </a:pPr>
             <a:r>
-              <a:rPr lang="en-US" sz="3400" b="1" dirty="0">
-                <a:solidFill>
-                  <a:srgbClr val="101828"/>
+              <a:rPr lang="en-US" sz="1500" dirty="0">
+                <a:solidFill>
+                  <a:srgbClr val="667085"/>
                 </a:solidFill>
                 <a:latin typeface="IBM Plex Sans" pitchFamily="34" charset="0"/>
                 <a:ea typeface="IBM Plex Sans" pitchFamily="34" charset="-122"/>
                 <a:cs typeface="IBM Plex Sans" pitchFamily="34" charset="-120"/>
               </a:rPr>
-              <a:t>Which algorithm?</a:t>
-            </a:r>
-            <a:endParaRPr lang="en-US" sz="3400" dirty="0"/>
-          </a:p>
-        </p:txBody>
-      </p:sp>
-      <p:sp>
-        <p:nvSpPr>
-          <p:cNvPr id="8" name="Shape 6"/>
+              <a:t>Hands down. Everyone commits.</a:t>
+            </a:r>
+            <a:endParaRPr lang="en-US" sz="1500" dirty="0"/>
+          </a:p>
+        </p:txBody>
+      </p:sp>
+      <p:sp>
+        <p:nvSpPr>
+          <p:cNvPr id="8" name="Text 6"/>
+          <p:cNvSpPr txBox="1"/>
+          <p:nvPr/>
+        </p:nvSpPr>
+        <p:spPr>
+          <a:xfrm>
+            <a:off x="502920" y="1097280"/>
+            <a:ext cx="11155680" cy="914400"/>
+          </a:xfrm>
+          <a:prstGeom prst="rect">
+            <a:avLst/>
+          </a:prstGeom>
+          <a:noFill/>
+          <a:ln/>
+        </p:spPr>
+        <p:txBody>
+          <a:bodyPr wrap="square" lIns="0" tIns="0" rIns="0" bIns="0" rtlCol="0" anchor="ctr"/>
+          <a:lstStyle/>
+          <a:p>
+            <a:pPr indent="0" marL="0">
+              <a:lnSpc>
+                <a:spcPct val="115000"/>
+              </a:lnSpc>
+              <a:buNone/>
+            </a:pPr>
+            <a:r>
+              <a:rPr lang="en-US" sz="2600" b="1" dirty="0">
+                <a:solidFill>
+                  <a:srgbClr val="101828"/>
+                </a:solidFill>
+                <a:latin typeface="IBM Plex Sans" pitchFamily="34" charset="0"/>
+                <a:ea typeface="IBM Plex Sans" pitchFamily="34" charset="-122"/>
+                <a:cs typeface="IBM Plex Sans" pitchFamily="34" charset="-120"/>
+              </a:rPr>
+              <a:t>What will this program display?</a:t>
+            </a:r>
+            <a:endParaRPr lang="en-US" sz="2600" dirty="0"/>
+          </a:p>
+        </p:txBody>
+      </p:sp>
+      <p:sp>
+        <p:nvSpPr>
+          <p:cNvPr id="9" name="Shape 7"/>
           <p:cNvSpPr/>
           <p:nvPr/>
         </p:nvSpPr>
         <p:spPr>
           <a:xfrm>
-            <a:off x="502920" y="2011680"/>
-            <a:ext cx="11155680" cy="2194560"/>
+            <a:off x="502920" y="2148840"/>
+            <a:ext cx="5029200" cy="2926080"/>
           </a:xfrm>
           <a:prstGeom prst="roundRect">
             <a:avLst>
-              <a:gd name="adj" fmla="val 5000"/>
+              <a:gd name="adj" fmla="val 3750"/>
             </a:avLst>
           </a:prstGeom>
           <a:solidFill>
@@ -3062,7 +3200,7 @@
           </a:solidFill>
           <a:ln w="15875">
             <a:solidFill>
-              <a:srgbClr val="2D63FF"/>
+              <a:srgbClr val="D9DEE7"/>
             </a:solidFill>
             <a:prstDash val="solid"/>
           </a:ln>
@@ -3070,33 +3208,323 @@
       </p:sp>
       <p:sp>
         <p:nvSpPr>
-          <p:cNvPr id="9" name="Text 7"/>
-          <p:cNvSpPr txBox="1"/>
-          <p:nvPr/>
-        </p:nvSpPr>
-        <p:spPr>
-          <a:xfrm>
-            <a:off x="1005840" y="2331720"/>
-            <a:ext cx="10149840" cy="1554480"/>
-          </a:xfrm>
-          <a:prstGeom prst="rect">
-            <a:avLst/>
-          </a:prstGeom>
-          <a:noFill/>
-          <a:ln/>
-        </p:spPr>
-        <p:txBody>
-          <a:bodyPr wrap="square" lIns="0" tIns="0" rIns="0" bIns="0" rtlCol="0" anchor="ctr"/>
+          <p:cNvPr id="10" name="Text 8"/>
+          <p:cNvSpPr txBox="1"/>
+          <p:nvPr/>
+        </p:nvSpPr>
+        <p:spPr>
+          <a:xfrm>
+            <a:off x="822960" y="2350008"/>
+            <a:ext cx="4480560" cy="2523744"/>
+          </a:xfrm>
+          <a:prstGeom prst="rect">
+            <a:avLst/>
+          </a:prstGeom>
+          <a:noFill/>
+          <a:ln/>
+        </p:spPr>
+        <p:txBody>
+          <a:bodyPr wrap="square" lIns="0" tIns="0" rIns="0" bIns="0" rtlCol="0" anchor="t"/>
           <a:lstStyle/>
           <a:p>
             <a:pPr indent="0" marL="0">
               <a:lnSpc>
-                <a:spcPct val="130000"/>
+                <a:spcPct val="125000"/>
               </a:lnSpc>
               <a:buNone/>
             </a:pPr>
             <a:r>
-              <a:rPr lang="en-US" sz="2200" dirty="0">
+              <a:rPr lang="en-US" sz="1500" dirty="0">
+                <a:solidFill>
+                  <a:srgbClr val="101828"/>
+                </a:solidFill>
+                <a:latin typeface="IBM Plex Mono" pitchFamily="34" charset="0"/>
+                <a:ea typeface="IBM Plex Mono" pitchFamily="34" charset="-122"/>
+                <a:cs typeface="IBM Plex Mono" pitchFamily="34" charset="-120"/>
+              </a:rPr>
+              <a:t>nums = [4, 2, 7]</a:t>
+            </a:r>
+            <a:endParaRPr lang="en-US" sz="1500" dirty="0"/>
+          </a:p>
+          <a:p>
+            <a:pPr indent="0" marL="0">
+              <a:lnSpc>
+                <a:spcPct val="125000"/>
+              </a:lnSpc>
+              <a:buNone/>
+            </a:pPr>
+            <a:r>
+              <a:rPr lang="en-US" sz="1500" dirty="0">
+                <a:solidFill>
+                  <a:srgbClr val="101828"/>
+                </a:solidFill>
+                <a:latin typeface="IBM Plex Mono" pitchFamily="34" charset="0"/>
+                <a:ea typeface="IBM Plex Mono" pitchFamily="34" charset="-122"/>
+                <a:cs typeface="IBM Plex Mono" pitchFamily="34" charset="-120"/>
+              </a:rPr>
+              <a:t>checks = 0</a:t>
+            </a:r>
+            <a:endParaRPr lang="en-US" sz="1500" dirty="0"/>
+          </a:p>
+          <a:p>
+            <a:pPr indent="0" marL="0">
+              <a:lnSpc>
+                <a:spcPct val="125000"/>
+              </a:lnSpc>
+              <a:buNone/>
+            </a:pPr>
+            <a:r>
+              <a:rPr lang="en-US" sz="1500" dirty="0">
+                <a:solidFill>
+                  <a:srgbClr val="101828"/>
+                </a:solidFill>
+                <a:latin typeface="IBM Plex Mono" pitchFamily="34" charset="0"/>
+                <a:ea typeface="IBM Plex Mono" pitchFamily="34" charset="-122"/>
+                <a:cs typeface="IBM Plex Mono" pitchFamily="34" charset="-120"/>
+              </a:rPr>
+              <a:t>for p in range(2):</a:t>
+            </a:r>
+            <a:endParaRPr lang="en-US" sz="1500" dirty="0"/>
+          </a:p>
+          <a:p>
+            <a:pPr indent="0" marL="0">
+              <a:lnSpc>
+                <a:spcPct val="125000"/>
+              </a:lnSpc>
+              <a:buNone/>
+            </a:pPr>
+            <a:r>
+              <a:rPr lang="en-US" sz="1500" dirty="0">
+                <a:solidFill>
+                  <a:srgbClr val="101828"/>
+                </a:solidFill>
+                <a:latin typeface="IBM Plex Mono" pitchFamily="34" charset="0"/>
+                <a:ea typeface="IBM Plex Mono" pitchFamily="34" charset="-122"/>
+                <a:cs typeface="IBM Plex Mono" pitchFamily="34" charset="-120"/>
+              </a:rPr>
+              <a:t>    for i in range(2):</a:t>
+            </a:r>
+            <a:endParaRPr lang="en-US" sz="1500" dirty="0"/>
+          </a:p>
+          <a:p>
+            <a:pPr indent="0" marL="0">
+              <a:lnSpc>
+                <a:spcPct val="125000"/>
+              </a:lnSpc>
+              <a:buNone/>
+            </a:pPr>
+            <a:r>
+              <a:rPr lang="en-US" sz="1500" dirty="0">
+                <a:solidFill>
+                  <a:srgbClr val="101828"/>
+                </a:solidFill>
+                <a:latin typeface="IBM Plex Mono" pitchFamily="34" charset="0"/>
+                <a:ea typeface="IBM Plex Mono" pitchFamily="34" charset="-122"/>
+                <a:cs typeface="IBM Plex Mono" pitchFamily="34" charset="-120"/>
+              </a:rPr>
+              <a:t>        checks = checks + 1</a:t>
+            </a:r>
+            <a:endParaRPr lang="en-US" sz="1500" dirty="0"/>
+          </a:p>
+          <a:p>
+            <a:pPr indent="0" marL="0">
+              <a:lnSpc>
+                <a:spcPct val="125000"/>
+              </a:lnSpc>
+              <a:buNone/>
+            </a:pPr>
+            <a:r>
+              <a:rPr lang="en-US" sz="1500" dirty="0">
+                <a:solidFill>
+                  <a:srgbClr val="101828"/>
+                </a:solidFill>
+                <a:latin typeface="IBM Plex Mono" pitchFamily="34" charset="0"/>
+                <a:ea typeface="IBM Plex Mono" pitchFamily="34" charset="-122"/>
+                <a:cs typeface="IBM Plex Mono" pitchFamily="34" charset="-120"/>
+              </a:rPr>
+              <a:t>        if nums[i] &gt; nums[i + 1]:</a:t>
+            </a:r>
+            <a:endParaRPr lang="en-US" sz="1500" dirty="0"/>
+          </a:p>
+          <a:p>
+            <a:pPr indent="0" marL="0">
+              <a:lnSpc>
+                <a:spcPct val="125000"/>
+              </a:lnSpc>
+              <a:buNone/>
+            </a:pPr>
+            <a:r>
+              <a:rPr lang="en-US" sz="1500" dirty="0">
+                <a:solidFill>
+                  <a:srgbClr val="101828"/>
+                </a:solidFill>
+                <a:latin typeface="IBM Plex Mono" pitchFamily="34" charset="0"/>
+                <a:ea typeface="IBM Plex Mono" pitchFamily="34" charset="-122"/>
+                <a:cs typeface="IBM Plex Mono" pitchFamily="34" charset="-120"/>
+              </a:rPr>
+              <a:t>            nums[i], nums[i + 1] = nums[i + 1], nums[i]</a:t>
+            </a:r>
+            <a:endParaRPr lang="en-US" sz="1500" dirty="0"/>
+          </a:p>
+          <a:p>
+            <a:pPr indent="0" marL="0">
+              <a:lnSpc>
+                <a:spcPct val="125000"/>
+              </a:lnSpc>
+              <a:buNone/>
+            </a:pPr>
+            <a:r>
+              <a:rPr lang="en-US" sz="1500" dirty="0">
+                <a:solidFill>
+                  <a:srgbClr val="101828"/>
+                </a:solidFill>
+                <a:latin typeface="IBM Plex Mono" pitchFamily="34" charset="0"/>
+                <a:ea typeface="IBM Plex Mono" pitchFamily="34" charset="-122"/>
+                <a:cs typeface="IBM Plex Mono" pitchFamily="34" charset="-120"/>
+              </a:rPr>
+              <a:t>print(nums)</a:t>
+            </a:r>
+            <a:endParaRPr lang="en-US" sz="1500" dirty="0"/>
+          </a:p>
+          <a:p>
+            <a:pPr indent="0" marL="0">
+              <a:lnSpc>
+                <a:spcPct val="125000"/>
+              </a:lnSpc>
+              <a:buNone/>
+            </a:pPr>
+            <a:r>
+              <a:rPr lang="en-US" sz="1500" dirty="0">
+                <a:solidFill>
+                  <a:srgbClr val="101828"/>
+                </a:solidFill>
+                <a:latin typeface="IBM Plex Mono" pitchFamily="34" charset="0"/>
+                <a:ea typeface="IBM Plex Mono" pitchFamily="34" charset="-122"/>
+                <a:cs typeface="IBM Plex Mono" pitchFamily="34" charset="-120"/>
+              </a:rPr>
+              <a:t>print(checks)</a:t>
+            </a:r>
+            <a:endParaRPr lang="en-US" sz="1500" dirty="0"/>
+          </a:p>
+        </p:txBody>
+      </p:sp>
+      <p:sp>
+        <p:nvSpPr>
+          <p:cNvPr id="11" name="Shape 9"/>
+          <p:cNvSpPr/>
+          <p:nvPr/>
+        </p:nvSpPr>
+        <p:spPr>
+          <a:xfrm>
+            <a:off x="5806440" y="2148840"/>
+            <a:ext cx="5852160" cy="731520"/>
+          </a:xfrm>
+          <a:prstGeom prst="roundRect">
+            <a:avLst>
+              <a:gd name="adj" fmla="val 15000"/>
+            </a:avLst>
+          </a:prstGeom>
+          <a:solidFill>
+            <a:srgbClr val="FFFFFF"/>
+          </a:solidFill>
+          <a:ln w="15875">
+            <a:solidFill>
+              <a:srgbClr val="D9DEE7"/>
+            </a:solidFill>
+            <a:prstDash val="solid"/>
+          </a:ln>
+        </p:spPr>
+      </p:sp>
+      <p:sp>
+        <p:nvSpPr>
+          <p:cNvPr id="12" name="Shape 10"/>
+          <p:cNvSpPr/>
+          <p:nvPr/>
+        </p:nvSpPr>
+        <p:spPr>
+          <a:xfrm>
+            <a:off x="6080760" y="2295144"/>
+            <a:ext cx="438912" cy="438912"/>
+          </a:xfrm>
+          <a:prstGeom prst="roundRect">
+            <a:avLst>
+              <a:gd name="adj" fmla="val 20833"/>
+            </a:avLst>
+          </a:prstGeom>
+          <a:solidFill>
+            <a:srgbClr val="EEF2FB"/>
+          </a:solidFill>
+          <a:ln/>
+        </p:spPr>
+      </p:sp>
+      <p:sp>
+        <p:nvSpPr>
+          <p:cNvPr id="13" name="Text 11"/>
+          <p:cNvSpPr txBox="1"/>
+          <p:nvPr/>
+        </p:nvSpPr>
+        <p:spPr>
+          <a:xfrm>
+            <a:off x="6080760" y="2295144"/>
+            <a:ext cx="438912" cy="438912"/>
+          </a:xfrm>
+          <a:prstGeom prst="rect">
+            <a:avLst/>
+          </a:prstGeom>
+          <a:noFill/>
+          <a:ln/>
+        </p:spPr>
+        <p:txBody>
+          <a:bodyPr wrap="square" lIns="0" tIns="0" rIns="0" bIns="0" rtlCol="0" anchor="ctr"/>
+          <a:lstStyle/>
+          <a:p>
+            <a:pPr algn="ctr" indent="0" marL="0">
+              <a:buNone/>
+            </a:pPr>
+            <a:r>
+              <a:rPr lang="en-US" sz="1300" b="1" dirty="0">
+                <a:solidFill>
+                  <a:srgbClr val="2D63FF"/>
+                </a:solidFill>
+                <a:latin typeface="IBM Plex Mono" pitchFamily="34" charset="0"/>
+                <a:ea typeface="IBM Plex Mono" pitchFamily="34" charset="-122"/>
+                <a:cs typeface="IBM Plex Mono" pitchFamily="34" charset="-120"/>
+              </a:rPr>
+              <a:t>A</a:t>
+            </a:r>
+            <a:endParaRPr lang="en-US" sz="1300" dirty="0"/>
+          </a:p>
+        </p:txBody>
+      </p:sp>
+      <p:sp>
+        <p:nvSpPr>
+          <p:cNvPr id="14" name="Text 12"/>
+          <p:cNvSpPr txBox="1"/>
+          <p:nvPr/>
+        </p:nvSpPr>
+        <p:spPr>
+          <a:xfrm>
+            <a:off x="6720840" y="2148840"/>
+            <a:ext cx="4754880" cy="731520"/>
+          </a:xfrm>
+          <a:prstGeom prst="rect">
+            <a:avLst/>
+          </a:prstGeom>
+          <a:noFill/>
+          <a:ln/>
+        </p:spPr>
+        <p:txBody>
+          <a:bodyPr wrap="square" lIns="0" tIns="0" rIns="0" bIns="0" rtlCol="0" anchor="ctr"/>
+          <a:lstStyle/>
+          <a:p>
+            <a:pPr indent="0" marL="0">
+              <a:lnSpc>
+                <a:spcPct val="115000"/>
+              </a:lnSpc>
+              <a:buNone/>
+            </a:pPr>
+            <a:r>
+              <a:rPr lang="en-US" sz="1700" dirty="0">
                 <a:solidFill>
                   <a:srgbClr val="101828"/>
                 </a:solidFill>
@@ -3104,48 +3532,329 @@
                 <a:ea typeface="IBM Plex Sans" pitchFamily="34" charset="-122"/>
                 <a:cs typeface="IBM Plex Sans" pitchFamily="34" charset="-120"/>
               </a:rPr>
-              <a:t>Eight descriptions are laid out on the floor below you. Tap the star and sort each one into the algorithm it describes.</a:t>
-            </a:r>
-            <a:endParaRPr lang="en-US" sz="2200" dirty="0"/>
-          </a:p>
-        </p:txBody>
-      </p:sp>
-      <p:sp>
-        <p:nvSpPr>
-          <p:cNvPr id="10" name="Text 8"/>
-          <p:cNvSpPr txBox="1"/>
-          <p:nvPr/>
-        </p:nvSpPr>
-        <p:spPr>
-          <a:xfrm>
-            <a:off x="502920" y="4526280"/>
-            <a:ext cx="11155680" cy="457200"/>
-          </a:xfrm>
-          <a:prstGeom prst="rect">
-            <a:avLst/>
-          </a:prstGeom>
-          <a:noFill/>
-          <a:ln/>
-        </p:spPr>
-        <p:txBody>
-          <a:bodyPr wrap="square" lIns="0" tIns="0" rIns="0" bIns="0" rtlCol="0" anchor="ctr"/>
-          <a:lstStyle/>
+              <a:t>[2, 4, 7]</a:t>
+            </a:r>
+            <a:endParaRPr lang="en-US" sz="1700" dirty="0"/>
+          </a:p>
           <a:p>
             <a:pPr indent="0" marL="0">
-              <a:buNone/>
-            </a:pPr>
-            <a:r>
-              <a:rPr lang="en-US" sz="1600" dirty="0">
-                <a:solidFill>
-                  <a:srgbClr val="667085"/>
+              <a:lnSpc>
+                <a:spcPct val="115000"/>
+              </a:lnSpc>
+              <a:buNone/>
+            </a:pPr>
+            <a:r>
+              <a:rPr lang="en-US" sz="1700" dirty="0">
+                <a:solidFill>
+                  <a:srgbClr val="101828"/>
                 </a:solidFill>
                 <a:latin typeface="IBM Plex Sans" pitchFamily="34" charset="0"/>
                 <a:ea typeface="IBM Plex Sans" pitchFamily="34" charset="-122"/>
                 <a:cs typeface="IBM Plex Sans" pitchFamily="34" charset="-120"/>
               </a:rPr>
-              <a:t>Predict on paper first, then look down and test it.</a:t>
-            </a:r>
-            <a:endParaRPr lang="en-US" sz="1600" dirty="0"/>
+              <a:t>6</a:t>
+            </a:r>
+            <a:endParaRPr lang="en-US" sz="1700" dirty="0"/>
+          </a:p>
+        </p:txBody>
+      </p:sp>
+      <p:sp>
+        <p:nvSpPr>
+          <p:cNvPr id="15" name="Shape 13"/>
+          <p:cNvSpPr/>
+          <p:nvPr/>
+        </p:nvSpPr>
+        <p:spPr>
+          <a:xfrm>
+            <a:off x="5806440" y="3017520"/>
+            <a:ext cx="5852160" cy="731520"/>
+          </a:xfrm>
+          <a:prstGeom prst="roundRect">
+            <a:avLst>
+              <a:gd name="adj" fmla="val 15000"/>
+            </a:avLst>
+          </a:prstGeom>
+          <a:solidFill>
+            <a:srgbClr val="FFFFFF"/>
+          </a:solidFill>
+          <a:ln w="15875">
+            <a:solidFill>
+              <a:srgbClr val="D9DEE7"/>
+            </a:solidFill>
+            <a:prstDash val="solid"/>
+          </a:ln>
+        </p:spPr>
+      </p:sp>
+      <p:sp>
+        <p:nvSpPr>
+          <p:cNvPr id="16" name="Shape 14"/>
+          <p:cNvSpPr/>
+          <p:nvPr/>
+        </p:nvSpPr>
+        <p:spPr>
+          <a:xfrm>
+            <a:off x="6080760" y="3163824"/>
+            <a:ext cx="438912" cy="438912"/>
+          </a:xfrm>
+          <a:prstGeom prst="roundRect">
+            <a:avLst>
+              <a:gd name="adj" fmla="val 20833"/>
+            </a:avLst>
+          </a:prstGeom>
+          <a:solidFill>
+            <a:srgbClr val="EEF2FB"/>
+          </a:solidFill>
+          <a:ln/>
+        </p:spPr>
+      </p:sp>
+      <p:sp>
+        <p:nvSpPr>
+          <p:cNvPr id="17" name="Text 15"/>
+          <p:cNvSpPr txBox="1"/>
+          <p:nvPr/>
+        </p:nvSpPr>
+        <p:spPr>
+          <a:xfrm>
+            <a:off x="6080760" y="3163824"/>
+            <a:ext cx="438912" cy="438912"/>
+          </a:xfrm>
+          <a:prstGeom prst="rect">
+            <a:avLst/>
+          </a:prstGeom>
+          <a:noFill/>
+          <a:ln/>
+        </p:spPr>
+        <p:txBody>
+          <a:bodyPr wrap="square" lIns="0" tIns="0" rIns="0" bIns="0" rtlCol="0" anchor="ctr"/>
+          <a:lstStyle/>
+          <a:p>
+            <a:pPr algn="ctr" indent="0" marL="0">
+              <a:buNone/>
+            </a:pPr>
+            <a:r>
+              <a:rPr lang="en-US" sz="1300" b="1" dirty="0">
+                <a:solidFill>
+                  <a:srgbClr val="2D63FF"/>
+                </a:solidFill>
+                <a:latin typeface="IBM Plex Mono" pitchFamily="34" charset="0"/>
+                <a:ea typeface="IBM Plex Mono" pitchFamily="34" charset="-122"/>
+                <a:cs typeface="IBM Plex Mono" pitchFamily="34" charset="-120"/>
+              </a:rPr>
+              <a:t>B</a:t>
+            </a:r>
+            <a:endParaRPr lang="en-US" sz="1300" dirty="0"/>
+          </a:p>
+        </p:txBody>
+      </p:sp>
+      <p:sp>
+        <p:nvSpPr>
+          <p:cNvPr id="18" name="Text 16"/>
+          <p:cNvSpPr txBox="1"/>
+          <p:nvPr/>
+        </p:nvSpPr>
+        <p:spPr>
+          <a:xfrm>
+            <a:off x="6720840" y="3017520"/>
+            <a:ext cx="4754880" cy="731520"/>
+          </a:xfrm>
+          <a:prstGeom prst="rect">
+            <a:avLst/>
+          </a:prstGeom>
+          <a:noFill/>
+          <a:ln/>
+        </p:spPr>
+        <p:txBody>
+          <a:bodyPr wrap="square" lIns="0" tIns="0" rIns="0" bIns="0" rtlCol="0" anchor="ctr"/>
+          <a:lstStyle/>
+          <a:p>
+            <a:pPr indent="0" marL="0">
+              <a:lnSpc>
+                <a:spcPct val="115000"/>
+              </a:lnSpc>
+              <a:buNone/>
+            </a:pPr>
+            <a:r>
+              <a:rPr lang="en-US" sz="1700" dirty="0">
+                <a:solidFill>
+                  <a:srgbClr val="101828"/>
+                </a:solidFill>
+                <a:latin typeface="IBM Plex Sans" pitchFamily="34" charset="0"/>
+                <a:ea typeface="IBM Plex Sans" pitchFamily="34" charset="-122"/>
+                <a:cs typeface="IBM Plex Sans" pitchFamily="34" charset="-120"/>
+              </a:rPr>
+              <a:t>[2, 4, 7]</a:t>
+            </a:r>
+            <a:endParaRPr lang="en-US" sz="1700" dirty="0"/>
+          </a:p>
+          <a:p>
+            <a:pPr indent="0" marL="0">
+              <a:lnSpc>
+                <a:spcPct val="115000"/>
+              </a:lnSpc>
+              <a:buNone/>
+            </a:pPr>
+            <a:r>
+              <a:rPr lang="en-US" sz="1700" dirty="0">
+                <a:solidFill>
+                  <a:srgbClr val="101828"/>
+                </a:solidFill>
+                <a:latin typeface="IBM Plex Sans" pitchFamily="34" charset="0"/>
+                <a:ea typeface="IBM Plex Sans" pitchFamily="34" charset="-122"/>
+                <a:cs typeface="IBM Plex Sans" pitchFamily="34" charset="-120"/>
+              </a:rPr>
+              <a:t>4</a:t>
+            </a:r>
+            <a:endParaRPr lang="en-US" sz="1700" dirty="0"/>
+          </a:p>
+        </p:txBody>
+      </p:sp>
+      <p:sp>
+        <p:nvSpPr>
+          <p:cNvPr id="19" name="Shape 17"/>
+          <p:cNvSpPr/>
+          <p:nvPr/>
+        </p:nvSpPr>
+        <p:spPr>
+          <a:xfrm>
+            <a:off x="5806440" y="3886200"/>
+            <a:ext cx="5852160" cy="731520"/>
+          </a:xfrm>
+          <a:prstGeom prst="roundRect">
+            <a:avLst>
+              <a:gd name="adj" fmla="val 15000"/>
+            </a:avLst>
+          </a:prstGeom>
+          <a:solidFill>
+            <a:srgbClr val="FFFFFF"/>
+          </a:solidFill>
+          <a:ln w="15875">
+            <a:solidFill>
+              <a:srgbClr val="D9DEE7"/>
+            </a:solidFill>
+            <a:prstDash val="solid"/>
+          </a:ln>
+        </p:spPr>
+      </p:sp>
+      <p:sp>
+        <p:nvSpPr>
+          <p:cNvPr id="20" name="Shape 18"/>
+          <p:cNvSpPr/>
+          <p:nvPr/>
+        </p:nvSpPr>
+        <p:spPr>
+          <a:xfrm>
+            <a:off x="6080760" y="4032504"/>
+            <a:ext cx="438912" cy="438912"/>
+          </a:xfrm>
+          <a:prstGeom prst="roundRect">
+            <a:avLst>
+              <a:gd name="adj" fmla="val 20833"/>
+            </a:avLst>
+          </a:prstGeom>
+          <a:solidFill>
+            <a:srgbClr val="EEF2FB"/>
+          </a:solidFill>
+          <a:ln/>
+        </p:spPr>
+      </p:sp>
+      <p:sp>
+        <p:nvSpPr>
+          <p:cNvPr id="21" name="Text 19"/>
+          <p:cNvSpPr txBox="1"/>
+          <p:nvPr/>
+        </p:nvSpPr>
+        <p:spPr>
+          <a:xfrm>
+            <a:off x="6080760" y="4032504"/>
+            <a:ext cx="438912" cy="438912"/>
+          </a:xfrm>
+          <a:prstGeom prst="rect">
+            <a:avLst/>
+          </a:prstGeom>
+          <a:noFill/>
+          <a:ln/>
+        </p:spPr>
+        <p:txBody>
+          <a:bodyPr wrap="square" lIns="0" tIns="0" rIns="0" bIns="0" rtlCol="0" anchor="ctr"/>
+          <a:lstStyle/>
+          <a:p>
+            <a:pPr algn="ctr" indent="0" marL="0">
+              <a:buNone/>
+            </a:pPr>
+            <a:r>
+              <a:rPr lang="en-US" sz="1300" b="1" dirty="0">
+                <a:solidFill>
+                  <a:srgbClr val="2D63FF"/>
+                </a:solidFill>
+                <a:latin typeface="IBM Plex Mono" pitchFamily="34" charset="0"/>
+                <a:ea typeface="IBM Plex Mono" pitchFamily="34" charset="-122"/>
+                <a:cs typeface="IBM Plex Mono" pitchFamily="34" charset="-120"/>
+              </a:rPr>
+              <a:t>C</a:t>
+            </a:r>
+            <a:endParaRPr lang="en-US" sz="1300" dirty="0"/>
+          </a:p>
+        </p:txBody>
+      </p:sp>
+      <p:sp>
+        <p:nvSpPr>
+          <p:cNvPr id="22" name="Text 20"/>
+          <p:cNvSpPr txBox="1"/>
+          <p:nvPr/>
+        </p:nvSpPr>
+        <p:spPr>
+          <a:xfrm>
+            <a:off x="6720840" y="3886200"/>
+            <a:ext cx="4754880" cy="731520"/>
+          </a:xfrm>
+          <a:prstGeom prst="rect">
+            <a:avLst/>
+          </a:prstGeom>
+          <a:noFill/>
+          <a:ln/>
+        </p:spPr>
+        <p:txBody>
+          <a:bodyPr wrap="square" lIns="0" tIns="0" rIns="0" bIns="0" rtlCol="0" anchor="ctr"/>
+          <a:lstStyle/>
+          <a:p>
+            <a:pPr indent="0" marL="0">
+              <a:lnSpc>
+                <a:spcPct val="115000"/>
+              </a:lnSpc>
+              <a:buNone/>
+            </a:pPr>
+            <a:r>
+              <a:rPr lang="en-US" sz="1700" dirty="0">
+                <a:solidFill>
+                  <a:srgbClr val="101828"/>
+                </a:solidFill>
+                <a:latin typeface="IBM Plex Sans" pitchFamily="34" charset="0"/>
+                <a:ea typeface="IBM Plex Sans" pitchFamily="34" charset="-122"/>
+                <a:cs typeface="IBM Plex Sans" pitchFamily="34" charset="-120"/>
+              </a:rPr>
+              <a:t>[2, 4, 7]</a:t>
+            </a:r>
+            <a:endParaRPr lang="en-US" sz="1700" dirty="0"/>
+          </a:p>
+          <a:p>
+            <a:pPr indent="0" marL="0">
+              <a:lnSpc>
+                <a:spcPct val="115000"/>
+              </a:lnSpc>
+              <a:buNone/>
+            </a:pPr>
+            <a:r>
+              <a:rPr lang="en-US" sz="1700" dirty="0">
+                <a:solidFill>
+                  <a:srgbClr val="101828"/>
+                </a:solidFill>
+                <a:latin typeface="IBM Plex Sans" pitchFamily="34" charset="0"/>
+                <a:ea typeface="IBM Plex Sans" pitchFamily="34" charset="-122"/>
+                <a:cs typeface="IBM Plex Sans" pitchFamily="34" charset="-120"/>
+              </a:rPr>
+              <a:t>2</a:t>
+            </a:r>
+            <a:endParaRPr lang="en-US" sz="1700" dirty="0"/>
           </a:p>
         </p:txBody>
       </p:sp>
@@ -3281,14 +3990,75 @@
       </p:sp>
       <p:sp>
         <p:nvSpPr>
-          <p:cNvPr id="5" name="Text 3"/>
-          <p:cNvSpPr txBox="1"/>
-          <p:nvPr/>
-        </p:nvSpPr>
-        <p:spPr>
-          <a:xfrm>
-            <a:off x="502920" y="411480"/>
-            <a:ext cx="11155680" cy="777240"/>
+          <p:cNvPr id="5" name="Shape 3"/>
+          <p:cNvSpPr/>
+          <p:nvPr/>
+        </p:nvSpPr>
+        <p:spPr>
+          <a:xfrm>
+            <a:off x="502920" y="438912"/>
+            <a:ext cx="3108960" cy="502920"/>
+          </a:xfrm>
+          <a:prstGeom prst="roundRect">
+            <a:avLst>
+              <a:gd name="adj" fmla="val 18182"/>
+            </a:avLst>
+          </a:prstGeom>
+          <a:solidFill>
+            <a:srgbClr val="F4B942"/>
+          </a:solidFill>
+          <a:ln/>
+        </p:spPr>
+      </p:sp>
+      <p:sp>
+        <p:nvSpPr>
+          <p:cNvPr id="6" name="Text 4"/>
+          <p:cNvSpPr txBox="1"/>
+          <p:nvPr/>
+        </p:nvSpPr>
+        <p:spPr>
+          <a:xfrm>
+            <a:off x="502920" y="438912"/>
+            <a:ext cx="3108960" cy="502920"/>
+          </a:xfrm>
+          <a:prstGeom prst="rect">
+            <a:avLst/>
+          </a:prstGeom>
+          <a:noFill/>
+          <a:ln/>
+        </p:spPr>
+        <p:txBody>
+          <a:bodyPr wrap="square" lIns="0" tIns="0" rIns="0" bIns="0" rtlCol="0" anchor="ctr"/>
+          <a:lstStyle/>
+          <a:p>
+            <a:pPr algn="ctr" indent="0" marL="0">
+              <a:buNone/>
+            </a:pPr>
+            <a:r>
+              <a:rPr lang="en-US" sz="1300" b="1" dirty="0">
+                <a:solidFill>
+                  <a:srgbClr val="101828"/>
+                </a:solidFill>
+                <a:latin typeface="IBM Plex Mono" pitchFamily="34" charset="0"/>
+                <a:ea typeface="IBM Plex Mono" pitchFamily="34" charset="-122"/>
+                <a:cs typeface="IBM Plex Mono" pitchFamily="34" charset="-120"/>
+              </a:rPr>
+              <a:t>★  FINAL CHALLENGE</a:t>
+            </a:r>
+            <a:endParaRPr lang="en-US" sz="1300" dirty="0"/>
+          </a:p>
+        </p:txBody>
+      </p:sp>
+      <p:sp>
+        <p:nvSpPr>
+          <p:cNvPr id="7" name="Text 5"/>
+          <p:cNvSpPr txBox="1"/>
+          <p:nvPr/>
+        </p:nvSpPr>
+        <p:spPr>
+          <a:xfrm>
+            <a:off x="502920" y="1097280"/>
+            <a:ext cx="11155680" cy="731520"/>
           </a:xfrm>
           <a:prstGeom prst="rect">
             <a:avLst/>
@@ -3304,7 +4074,7 @@
               <a:buNone/>
             </a:pPr>
             <a:r>
-              <a:rPr lang="en-US" sz="3200" b="1" dirty="0">
+              <a:rPr lang="en-US" sz="3400" b="1" dirty="0">
                 <a:solidFill>
                   <a:srgbClr val="101828"/>
                 </a:solidFill>
@@ -3312,65 +4082,26 @@
                 <a:ea typeface="IBM Plex Sans" pitchFamily="34" charset="-122"/>
                 <a:cs typeface="IBM Plex Sans" pitchFamily="34" charset="-120"/>
               </a:rPr>
-              <a:t>Worth knowing</a:t>
-            </a:r>
-            <a:endParaRPr lang="en-US" sz="3200" dirty="0"/>
-          </a:p>
-        </p:txBody>
-      </p:sp>
-      <p:sp>
-        <p:nvSpPr>
-          <p:cNvPr id="6" name="Text 4"/>
-          <p:cNvSpPr txBox="1"/>
-          <p:nvPr/>
-        </p:nvSpPr>
-        <p:spPr>
-          <a:xfrm>
-            <a:off x="502920" y="1170432"/>
-            <a:ext cx="11155680" cy="411480"/>
-          </a:xfrm>
-          <a:prstGeom prst="rect">
-            <a:avLst/>
-          </a:prstGeom>
-          <a:noFill/>
-          <a:ln/>
-        </p:spPr>
-        <p:txBody>
-          <a:bodyPr wrap="square" lIns="0" tIns="0" rIns="0" bIns="0" rtlCol="0" anchor="ctr"/>
-          <a:lstStyle/>
-          <a:p>
-            <a:pPr indent="0" marL="0">
-              <a:buNone/>
-            </a:pPr>
-            <a:r>
-              <a:rPr lang="en-US" sz="1500" dirty="0">
-                <a:solidFill>
-                  <a:srgbClr val="667085"/>
-                </a:solidFill>
-                <a:latin typeface="IBM Plex Sans" pitchFamily="34" charset="0"/>
-                <a:ea typeface="IBM Plex Sans" pitchFamily="34" charset="-122"/>
-                <a:cs typeface="IBM Plex Sans" pitchFamily="34" charset="-120"/>
-              </a:rPr>
-              <a:t>The information markers dotted around the room</a:t>
-            </a:r>
-            <a:endParaRPr lang="en-US" sz="1500" dirty="0"/>
-          </a:p>
-        </p:txBody>
-      </p:sp>
-      <p:sp>
-        <p:nvSpPr>
-          <p:cNvPr id="7" name="Shape 5"/>
+              <a:t>Which algorithm?</a:t>
+            </a:r>
+            <a:endParaRPr lang="en-US" sz="3400" dirty="0"/>
+          </a:p>
+        </p:txBody>
+      </p:sp>
+      <p:sp>
+        <p:nvSpPr>
+          <p:cNvPr id="8" name="Shape 6"/>
           <p:cNvSpPr/>
           <p:nvPr/>
         </p:nvSpPr>
         <p:spPr>
           <a:xfrm>
-            <a:off x="502920" y="1828800"/>
-            <a:ext cx="5394960" cy="1737360"/>
+            <a:off x="502920" y="2011680"/>
+            <a:ext cx="11155680" cy="2194560"/>
           </a:xfrm>
           <a:prstGeom prst="roundRect">
             <a:avLst>
-              <a:gd name="adj" fmla="val 6316"/>
+              <a:gd name="adj" fmla="val 5000"/>
             </a:avLst>
           </a:prstGeom>
           <a:solidFill>
@@ -3386,14 +4117,14 @@
       </p:sp>
       <p:sp>
         <p:nvSpPr>
-          <p:cNvPr id="8" name="Text 6"/>
-          <p:cNvSpPr txBox="1"/>
-          <p:nvPr/>
-        </p:nvSpPr>
-        <p:spPr>
-          <a:xfrm>
-            <a:off x="822960" y="2011680"/>
-            <a:ext cx="4754880" cy="365760"/>
+          <p:cNvPr id="9" name="Text 7"/>
+          <p:cNvSpPr txBox="1"/>
+          <p:nvPr/>
+        </p:nvSpPr>
+        <p:spPr>
+          <a:xfrm>
+            <a:off x="1005840" y="2331720"/>
+            <a:ext cx="10149840" cy="1554480"/>
           </a:xfrm>
           <a:prstGeom prst="rect">
             <a:avLst/>
@@ -3406,52 +4137,52 @@
           <a:lstStyle/>
           <a:p>
             <a:pPr indent="0" marL="0">
-              <a:buNone/>
-            </a:pPr>
-            <a:r>
-              <a:rPr lang="en-US" sz="1600" b="1" dirty="0">
-                <a:solidFill>
-                  <a:srgbClr val="2D63FF"/>
+              <a:lnSpc>
+                <a:spcPct val="130000"/>
+              </a:lnSpc>
+              <a:buNone/>
+            </a:pPr>
+            <a:r>
+              <a:rPr lang="en-US" sz="2200" dirty="0">
+                <a:solidFill>
+                  <a:srgbClr val="101828"/>
                 </a:solidFill>
                 <a:latin typeface="IBM Plex Sans" pitchFamily="34" charset="0"/>
                 <a:ea typeface="IBM Plex Sans" pitchFamily="34" charset="-122"/>
                 <a:cs typeface="IBM Plex Sans" pitchFamily="34" charset="-120"/>
               </a:rPr>
-              <a:t>The found flag</a:t>
-            </a:r>
-            <a:endParaRPr lang="en-US" sz="1600" dirty="0"/>
-          </a:p>
-        </p:txBody>
-      </p:sp>
-      <p:sp>
-        <p:nvSpPr>
-          <p:cNvPr id="9" name="Text 7"/>
-          <p:cNvSpPr txBox="1"/>
-          <p:nvPr/>
-        </p:nvSpPr>
-        <p:spPr>
-          <a:xfrm>
-            <a:off x="822960" y="2395728"/>
-            <a:ext cx="4754880" cy="1005840"/>
-          </a:xfrm>
-          <a:prstGeom prst="rect">
-            <a:avLst/>
-          </a:prstGeom>
-          <a:noFill/>
-          <a:ln/>
-        </p:spPr>
-        <p:txBody>
-          <a:bodyPr wrap="square" lIns="0" tIns="0" rIns="0" bIns="0" rtlCol="0" anchor="t"/>
+              <a:t>Eight descriptions are laid out on the floor below you. Tap the star and sort each one into the algorithm it describes.</a:t>
+            </a:r>
+            <a:endParaRPr lang="en-US" sz="2200" dirty="0"/>
+          </a:p>
+        </p:txBody>
+      </p:sp>
+      <p:sp>
+        <p:nvSpPr>
+          <p:cNvPr id="10" name="Text 8"/>
+          <p:cNvSpPr txBox="1"/>
+          <p:nvPr/>
+        </p:nvSpPr>
+        <p:spPr>
+          <a:xfrm>
+            <a:off x="502920" y="4526280"/>
+            <a:ext cx="11155680" cy="457200"/>
+          </a:xfrm>
+          <a:prstGeom prst="rect">
+            <a:avLst/>
+          </a:prstGeom>
+          <a:noFill/>
+          <a:ln/>
+        </p:spPr>
+        <p:txBody>
+          <a:bodyPr wrap="square" lIns="0" tIns="0" rIns="0" bIns="0" rtlCol="0" anchor="ctr"/>
           <a:lstStyle/>
           <a:p>
             <a:pPr indent="0" marL="0">
-              <a:lnSpc>
-                <a:spcPct val="120000"/>
-              </a:lnSpc>
-              <a:buNone/>
-            </a:pPr>
-            <a:r>
-              <a:rPr lang="en-US" sz="1300" dirty="0">
+              <a:buNone/>
+            </a:pPr>
+            <a:r>
+              <a:rPr lang="en-US" sz="1600" dirty="0">
                 <a:solidFill>
                   <a:srgbClr val="667085"/>
                 </a:solidFill>
@@ -3459,333 +4190,9 @@
                 <a:ea typeface="IBM Plex Sans" pitchFamily="34" charset="-122"/>
                 <a:cs typeface="IBM Plex Sans" pitchFamily="34" charset="-120"/>
               </a:rPr>
-              <a:t>A flag set to False before the loop is the tidiest way to report 'not found' exactly once. The position a search finds is useful in itself: it reads the matching item out of a second list filled in the same order.</a:t>
-            </a:r>
-            <a:endParaRPr lang="en-US" sz="1300" dirty="0"/>
-          </a:p>
-        </p:txBody>
-      </p:sp>
-      <p:sp>
-        <p:nvSpPr>
-          <p:cNvPr id="10" name="Shape 8"/>
-          <p:cNvSpPr/>
-          <p:nvPr/>
-        </p:nvSpPr>
-        <p:spPr>
-          <a:xfrm>
-            <a:off x="6217920" y="1828800"/>
-            <a:ext cx="5394960" cy="1737360"/>
-          </a:xfrm>
-          <a:prstGeom prst="roundRect">
-            <a:avLst>
-              <a:gd name="adj" fmla="val 6316"/>
-            </a:avLst>
-          </a:prstGeom>
-          <a:solidFill>
-            <a:srgbClr val="FFFFFF"/>
-          </a:solidFill>
-          <a:ln w="15875">
-            <a:solidFill>
-              <a:srgbClr val="08A6A6"/>
-            </a:solidFill>
-            <a:prstDash val="solid"/>
-          </a:ln>
-        </p:spPr>
-      </p:sp>
-      <p:sp>
-        <p:nvSpPr>
-          <p:cNvPr id="11" name="Text 9"/>
-          <p:cNvSpPr txBox="1"/>
-          <p:nvPr/>
-        </p:nvSpPr>
-        <p:spPr>
-          <a:xfrm>
-            <a:off x="6537960" y="2011680"/>
-            <a:ext cx="4754880" cy="365760"/>
-          </a:xfrm>
-          <a:prstGeom prst="rect">
-            <a:avLst/>
-          </a:prstGeom>
-          <a:noFill/>
-          <a:ln/>
-        </p:spPr>
-        <p:txBody>
-          <a:bodyPr wrap="square" lIns="0" tIns="0" rIns="0" bIns="0" rtlCol="0" anchor="ctr"/>
-          <a:lstStyle/>
-          <a:p>
-            <a:pPr indent="0" marL="0">
-              <a:buNone/>
-            </a:pPr>
-            <a:r>
-              <a:rPr lang="en-US" sz="1600" b="1" dirty="0">
-                <a:solidFill>
-                  <a:srgbClr val="08A6A6"/>
-                </a:solidFill>
-                <a:latin typeface="IBM Plex Sans" pitchFamily="34" charset="0"/>
-                <a:ea typeface="IBM Plex Sans" pitchFamily="34" charset="-122"/>
-                <a:cs typeface="IBM Plex Sans" pitchFamily="34" charset="-120"/>
-              </a:rPr>
-              <a:t>Whole middles only</a:t>
+              <a:t>Predict on paper first, then look down and test it.</a:t>
             </a:r>
             <a:endParaRPr lang="en-US" sz="1600" dirty="0"/>
-          </a:p>
-        </p:txBody>
-      </p:sp>
-      <p:sp>
-        <p:nvSpPr>
-          <p:cNvPr id="12" name="Text 10"/>
-          <p:cNvSpPr txBox="1"/>
-          <p:nvPr/>
-        </p:nvSpPr>
-        <p:spPr>
-          <a:xfrm>
-            <a:off x="6537960" y="2395728"/>
-            <a:ext cx="4754880" cy="1005840"/>
-          </a:xfrm>
-          <a:prstGeom prst="rect">
-            <a:avLst/>
-          </a:prstGeom>
-          <a:noFill/>
-          <a:ln/>
-        </p:spPr>
-        <p:txBody>
-          <a:bodyPr wrap="square" lIns="0" tIns="0" rIns="0" bIns="0" rtlCol="0" anchor="t"/>
-          <a:lstStyle/>
-          <a:p>
-            <a:pPr indent="0" marL="0">
-              <a:lnSpc>
-                <a:spcPct val="120000"/>
-              </a:lnSpc>
-              <a:buNone/>
-            </a:pPr>
-            <a:r>
-              <a:rPr lang="en-US" sz="1300" dirty="0">
-                <a:solidFill>
-                  <a:srgbClr val="667085"/>
-                </a:solidFill>
-                <a:latin typeface="IBM Plex Sans" pitchFamily="34" charset="0"/>
-                <a:ea typeface="IBM Plex Sans" pitchFamily="34" charset="-122"/>
-                <a:cs typeface="IBM Plex Sans" pitchFamily="34" charset="-120"/>
-              </a:rPr>
-              <a:t>mid = (low + high) // 2 uses // so the middle is a whole number: a list index can never be 3.5.</a:t>
-            </a:r>
-            <a:endParaRPr lang="en-US" sz="1300" dirty="0"/>
-          </a:p>
-        </p:txBody>
-      </p:sp>
-      <p:sp>
-        <p:nvSpPr>
-          <p:cNvPr id="13" name="Shape 11"/>
-          <p:cNvSpPr/>
-          <p:nvPr/>
-        </p:nvSpPr>
-        <p:spPr>
-          <a:xfrm>
-            <a:off x="502920" y="3794760"/>
-            <a:ext cx="5394960" cy="1737360"/>
-          </a:xfrm>
-          <a:prstGeom prst="roundRect">
-            <a:avLst>
-              <a:gd name="adj" fmla="val 6316"/>
-            </a:avLst>
-          </a:prstGeom>
-          <a:solidFill>
-            <a:srgbClr val="FFFFFF"/>
-          </a:solidFill>
-          <a:ln w="15875">
-            <a:solidFill>
-              <a:srgbClr val="2D63FF"/>
-            </a:solidFill>
-            <a:prstDash val="solid"/>
-          </a:ln>
-        </p:spPr>
-      </p:sp>
-      <p:sp>
-        <p:nvSpPr>
-          <p:cNvPr id="14" name="Text 12"/>
-          <p:cNvSpPr txBox="1"/>
-          <p:nvPr/>
-        </p:nvSpPr>
-        <p:spPr>
-          <a:xfrm>
-            <a:off x="822960" y="3977640"/>
-            <a:ext cx="4754880" cy="365760"/>
-          </a:xfrm>
-          <a:prstGeom prst="rect">
-            <a:avLst/>
-          </a:prstGeom>
-          <a:noFill/>
-          <a:ln/>
-        </p:spPr>
-        <p:txBody>
-          <a:bodyPr wrap="square" lIns="0" tIns="0" rIns="0" bIns="0" rtlCol="0" anchor="ctr"/>
-          <a:lstStyle/>
-          <a:p>
-            <a:pPr indent="0" marL="0">
-              <a:buNone/>
-            </a:pPr>
-            <a:r>
-              <a:rPr lang="en-US" sz="1600" b="1" dirty="0">
-                <a:solidFill>
-                  <a:srgbClr val="2D63FF"/>
-                </a:solidFill>
-                <a:latin typeface="IBM Plex Sans" pitchFamily="34" charset="0"/>
-                <a:ea typeface="IBM Plex Sans" pitchFamily="34" charset="-122"/>
-                <a:cs typeface="IBM Plex Sans" pitchFamily="34" charset="-120"/>
-              </a:rPr>
-              <a:t>Swapping in one line</a:t>
-            </a:r>
-            <a:endParaRPr lang="en-US" sz="1600" dirty="0"/>
-          </a:p>
-        </p:txBody>
-      </p:sp>
-      <p:sp>
-        <p:nvSpPr>
-          <p:cNvPr id="15" name="Text 13"/>
-          <p:cNvSpPr txBox="1"/>
-          <p:nvPr/>
-        </p:nvSpPr>
-        <p:spPr>
-          <a:xfrm>
-            <a:off x="822960" y="4361688"/>
-            <a:ext cx="4754880" cy="1005840"/>
-          </a:xfrm>
-          <a:prstGeom prst="rect">
-            <a:avLst/>
-          </a:prstGeom>
-          <a:noFill/>
-          <a:ln/>
-        </p:spPr>
-        <p:txBody>
-          <a:bodyPr wrap="square" lIns="0" tIns="0" rIns="0" bIns="0" rtlCol="0" anchor="t"/>
-          <a:lstStyle/>
-          <a:p>
-            <a:pPr indent="0" marL="0">
-              <a:lnSpc>
-                <a:spcPct val="120000"/>
-              </a:lnSpc>
-              <a:buNone/>
-            </a:pPr>
-            <a:r>
-              <a:rPr lang="en-US" sz="1300" dirty="0">
-                <a:solidFill>
-                  <a:srgbClr val="667085"/>
-                </a:solidFill>
-                <a:latin typeface="IBM Plex Sans" pitchFamily="34" charset="0"/>
-                <a:ea typeface="IBM Plex Sans" pitchFamily="34" charset="-122"/>
-                <a:cs typeface="IBM Plex Sans" pitchFamily="34" charset="-120"/>
-              </a:rPr>
-              <a:t>Python can swap two values in one line with a, b = b, a. Most languages need a third variable to hold one of them.</a:t>
-            </a:r>
-            <a:endParaRPr lang="en-US" sz="1300" dirty="0"/>
-          </a:p>
-        </p:txBody>
-      </p:sp>
-      <p:sp>
-        <p:nvSpPr>
-          <p:cNvPr id="16" name="Shape 14"/>
-          <p:cNvSpPr/>
-          <p:nvPr/>
-        </p:nvSpPr>
-        <p:spPr>
-          <a:xfrm>
-            <a:off x="6217920" y="3794760"/>
-            <a:ext cx="5394960" cy="1737360"/>
-          </a:xfrm>
-          <a:prstGeom prst="roundRect">
-            <a:avLst>
-              <a:gd name="adj" fmla="val 6316"/>
-            </a:avLst>
-          </a:prstGeom>
-          <a:solidFill>
-            <a:srgbClr val="FFFFFF"/>
-          </a:solidFill>
-          <a:ln w="15875">
-            <a:solidFill>
-              <a:srgbClr val="08A6A6"/>
-            </a:solidFill>
-            <a:prstDash val="solid"/>
-          </a:ln>
-        </p:spPr>
-      </p:sp>
-      <p:sp>
-        <p:nvSpPr>
-          <p:cNvPr id="17" name="Text 15"/>
-          <p:cNvSpPr txBox="1"/>
-          <p:nvPr/>
-        </p:nvSpPr>
-        <p:spPr>
-          <a:xfrm>
-            <a:off x="6537960" y="3977640"/>
-            <a:ext cx="4754880" cy="365760"/>
-          </a:xfrm>
-          <a:prstGeom prst="rect">
-            <a:avLst/>
-          </a:prstGeom>
-          <a:noFill/>
-          <a:ln/>
-        </p:spPr>
-        <p:txBody>
-          <a:bodyPr wrap="square" lIns="0" tIns="0" rIns="0" bIns="0" rtlCol="0" anchor="ctr"/>
-          <a:lstStyle/>
-          <a:p>
-            <a:pPr indent="0" marL="0">
-              <a:buNone/>
-            </a:pPr>
-            <a:r>
-              <a:rPr lang="en-US" sz="1600" b="1" dirty="0">
-                <a:solidFill>
-                  <a:srgbClr val="08A6A6"/>
-                </a:solidFill>
-                <a:latin typeface="IBM Plex Sans" pitchFamily="34" charset="0"/>
-                <a:ea typeface="IBM Plex Sans" pitchFamily="34" charset="-122"/>
-                <a:cs typeface="IBM Plex Sans" pitchFamily="34" charset="-120"/>
-              </a:rPr>
-              <a:t>Nearly sorted</a:t>
-            </a:r>
-            <a:endParaRPr lang="en-US" sz="1600" dirty="0"/>
-          </a:p>
-        </p:txBody>
-      </p:sp>
-      <p:sp>
-        <p:nvSpPr>
-          <p:cNvPr id="18" name="Text 16"/>
-          <p:cNvSpPr txBox="1"/>
-          <p:nvPr/>
-        </p:nvSpPr>
-        <p:spPr>
-          <a:xfrm>
-            <a:off x="6537960" y="4361688"/>
-            <a:ext cx="4754880" cy="1005840"/>
-          </a:xfrm>
-          <a:prstGeom prst="rect">
-            <a:avLst/>
-          </a:prstGeom>
-          <a:noFill/>
-          <a:ln/>
-        </p:spPr>
-        <p:txBody>
-          <a:bodyPr wrap="square" lIns="0" tIns="0" rIns="0" bIns="0" rtlCol="0" anchor="t"/>
-          <a:lstStyle/>
-          <a:p>
-            <a:pPr indent="0" marL="0">
-              <a:lnSpc>
-                <a:spcPct val="120000"/>
-              </a:lnSpc>
-              <a:buNone/>
-            </a:pPr>
-            <a:r>
-              <a:rPr lang="en-US" sz="1300" dirty="0">
-                <a:solidFill>
-                  <a:srgbClr val="667085"/>
-                </a:solidFill>
-                <a:latin typeface="IBM Plex Sans" pitchFamily="34" charset="0"/>
-                <a:ea typeface="IBM Plex Sans" pitchFamily="34" charset="-122"/>
-                <a:cs typeface="IBM Plex Sans" pitchFamily="34" charset="-120"/>
-              </a:rPr>
-              <a:t>On a list that is almost in order an insertion sort is very quick, because hardly anything has to move. The same code sorts words as well as numbers, because &gt; compares two strings by character code.</a:t>
-            </a:r>
-            <a:endParaRPr lang="en-US" sz="1300" dirty="0"/>
           </a:p>
         </p:txBody>
       </p:sp>
@@ -3952,7 +4359,7 @@
                 <a:ea typeface="IBM Plex Sans" pitchFamily="34" charset="-122"/>
                 <a:cs typeface="IBM Plex Sans" pitchFamily="34" charset="-120"/>
               </a:rPr>
-              <a:t>Exam practice</a:t>
+              <a:t>Worth knowing</a:t>
             </a:r>
             <a:endParaRPr lang="en-US" sz="3200" dirty="0"/>
           </a:p>
@@ -3991,7 +4398,7 @@
                 <a:ea typeface="IBM Plex Sans" pitchFamily="34" charset="-122"/>
                 <a:cs typeface="IBM Plex Sans" pitchFamily="34" charset="-120"/>
               </a:rPr>
-              <a:t>Devices away. Answer from memory on the worksheet.</a:t>
+              <a:t>The information markers dotted around the room</a:t>
             </a:r>
             <a:endParaRPr lang="en-US" sz="1500" dirty="0"/>
           </a:p>
@@ -4006,11 +4413,11 @@
         <p:spPr>
           <a:xfrm>
             <a:off x="502920" y="1828800"/>
-            <a:ext cx="11155680" cy="1097280"/>
+            <a:ext cx="5394960" cy="1737360"/>
           </a:xfrm>
           <a:prstGeom prst="roundRect">
             <a:avLst>
-              <a:gd name="adj" fmla="val 10000"/>
+              <a:gd name="adj" fmla="val 6316"/>
             </a:avLst>
           </a:prstGeom>
           <a:solidFill>
@@ -4018,7 +4425,7 @@
           </a:solidFill>
           <a:ln w="15875">
             <a:solidFill>
-              <a:srgbClr val="D9DEE7"/>
+              <a:srgbClr val="2D63FF"/>
             </a:solidFill>
             <a:prstDash val="solid"/>
           </a:ln>
@@ -4032,8 +4439,8 @@
         </p:nvSpPr>
         <p:spPr>
           <a:xfrm>
-            <a:off x="914400" y="1938528"/>
-            <a:ext cx="9418320" cy="877824"/>
+            <a:off x="822960" y="2011680"/>
+            <a:ext cx="4754880" cy="365760"/>
           </a:xfrm>
           <a:prstGeom prst="rect">
             <a:avLst/>
@@ -4046,101 +4453,79 @@
           <a:lstStyle/>
           <a:p>
             <a:pPr indent="0" marL="0">
-              <a:lnSpc>
-                <a:spcPct val="118000"/>
-              </a:lnSpc>
-              <a:buNone/>
-            </a:pPr>
-            <a:r>
-              <a:rPr lang="en-US" sz="1700" dirty="0">
-                <a:solidFill>
-                  <a:srgbClr val="101828"/>
+              <a:buNone/>
+            </a:pPr>
+            <a:r>
+              <a:rPr lang="en-US" sz="1600" b="1" dirty="0">
+                <a:solidFill>
+                  <a:srgbClr val="2D63FF"/>
                 </a:solidFill>
                 <a:latin typeface="IBM Plex Sans" pitchFamily="34" charset="0"/>
                 <a:ea typeface="IBM Plex Sans" pitchFamily="34" charset="-122"/>
                 <a:cs typeface="IBM Plex Sans" pitchFamily="34" charset="-120"/>
               </a:rPr>
-              <a:t>A linear search prints Not found from inside its loop, so one search prints that message several times. State where the message should go instead, and explain why putting it there fixes the problem.</a:t>
-            </a:r>
-            <a:endParaRPr lang="en-US" sz="1700" dirty="0"/>
-          </a:p>
-        </p:txBody>
-      </p:sp>
-      <p:sp>
-        <p:nvSpPr>
-          <p:cNvPr id="9" name="Shape 7"/>
+              <a:t>The found flag</a:t>
+            </a:r>
+            <a:endParaRPr lang="en-US" sz="1600" dirty="0"/>
+          </a:p>
+        </p:txBody>
+      </p:sp>
+      <p:sp>
+        <p:nvSpPr>
+          <p:cNvPr id="9" name="Text 7"/>
+          <p:cNvSpPr txBox="1"/>
+          <p:nvPr/>
+        </p:nvSpPr>
+        <p:spPr>
+          <a:xfrm>
+            <a:off x="822960" y="2395728"/>
+            <a:ext cx="4754880" cy="1005840"/>
+          </a:xfrm>
+          <a:prstGeom prst="rect">
+            <a:avLst/>
+          </a:prstGeom>
+          <a:noFill/>
+          <a:ln/>
+        </p:spPr>
+        <p:txBody>
+          <a:bodyPr wrap="square" lIns="0" tIns="0" rIns="0" bIns="0" rtlCol="0" anchor="t"/>
+          <a:lstStyle/>
+          <a:p>
+            <a:pPr indent="0" marL="0">
+              <a:lnSpc>
+                <a:spcPct val="120000"/>
+              </a:lnSpc>
+              <a:buNone/>
+            </a:pPr>
+            <a:r>
+              <a:rPr lang="en-US" sz="1300" dirty="0">
+                <a:solidFill>
+                  <a:srgbClr val="667085"/>
+                </a:solidFill>
+                <a:latin typeface="IBM Plex Sans" pitchFamily="34" charset="0"/>
+                <a:ea typeface="IBM Plex Sans" pitchFamily="34" charset="-122"/>
+                <a:cs typeface="IBM Plex Sans" pitchFamily="34" charset="-120"/>
+              </a:rPr>
+              <a:t>A flag set to False before the loop is the tidiest way to report 'not found' exactly once. The position a search finds is useful in itself: it reads the matching item out of a second list filled in the same order.</a:t>
+            </a:r>
+            <a:endParaRPr lang="en-US" sz="1300" dirty="0"/>
+          </a:p>
+        </p:txBody>
+      </p:sp>
+      <p:sp>
+        <p:nvSpPr>
+          <p:cNvPr id="10" name="Shape 8"/>
           <p:cNvSpPr/>
           <p:nvPr/>
         </p:nvSpPr>
         <p:spPr>
           <a:xfrm>
-            <a:off x="10515600" y="2130552"/>
-            <a:ext cx="868680" cy="493776"/>
+            <a:off x="6217920" y="1828800"/>
+            <a:ext cx="5394960" cy="1737360"/>
           </a:xfrm>
           <a:prstGeom prst="roundRect">
             <a:avLst>
-              <a:gd name="adj" fmla="val 18519"/>
-            </a:avLst>
-          </a:prstGeom>
-          <a:solidFill>
-            <a:srgbClr val="EEF2FB"/>
-          </a:solidFill>
-          <a:ln/>
-        </p:spPr>
-      </p:sp>
-      <p:sp>
-        <p:nvSpPr>
-          <p:cNvPr id="10" name="Text 8"/>
-          <p:cNvSpPr txBox="1"/>
-          <p:nvPr/>
-        </p:nvSpPr>
-        <p:spPr>
-          <a:xfrm>
-            <a:off x="10515600" y="2130552"/>
-            <a:ext cx="868680" cy="493776"/>
-          </a:xfrm>
-          <a:prstGeom prst="rect">
-            <a:avLst/>
-          </a:prstGeom>
-          <a:noFill/>
-          <a:ln/>
-        </p:spPr>
-        <p:txBody>
-          <a:bodyPr wrap="square" lIns="0" tIns="0" rIns="0" bIns="0" rtlCol="0" anchor="ctr"/>
-          <a:lstStyle/>
-          <a:p>
-            <a:pPr algn="ctr" indent="0" marL="0">
-              <a:buNone/>
-            </a:pPr>
-            <a:r>
-              <a:rPr lang="en-US" sz="1500" b="1" dirty="0">
-                <a:solidFill>
-                  <a:srgbClr val="2D63FF"/>
-                </a:solidFill>
-                <a:latin typeface="IBM Plex Mono" pitchFamily="34" charset="0"/>
-                <a:ea typeface="IBM Plex Mono" pitchFamily="34" charset="-122"/>
-                <a:cs typeface="IBM Plex Mono" pitchFamily="34" charset="-120"/>
-              </a:rPr>
-              <a:t>[3]</a:t>
-            </a:r>
-            <a:endParaRPr lang="en-US" sz="1500" dirty="0"/>
-          </a:p>
-        </p:txBody>
-      </p:sp>
-      <p:sp>
-        <p:nvSpPr>
-          <p:cNvPr id="11" name="Shape 9"/>
-          <p:cNvSpPr/>
-          <p:nvPr/>
-        </p:nvSpPr>
-        <p:spPr>
-          <a:xfrm>
-            <a:off x="502920" y="3127248"/>
-            <a:ext cx="11155680" cy="1097280"/>
-          </a:xfrm>
-          <a:prstGeom prst="roundRect">
-            <a:avLst>
-              <a:gd name="adj" fmla="val 10000"/>
+              <a:gd name="adj" fmla="val 6316"/>
             </a:avLst>
           </a:prstGeom>
           <a:solidFill>
@@ -4148,7 +4533,7 @@
           </a:solidFill>
           <a:ln w="15875">
             <a:solidFill>
-              <a:srgbClr val="D9DEE7"/>
+              <a:srgbClr val="08A6A6"/>
             </a:solidFill>
             <a:prstDash val="solid"/>
           </a:ln>
@@ -4156,14 +4541,14 @@
       </p:sp>
       <p:sp>
         <p:nvSpPr>
-          <p:cNvPr id="12" name="Text 10"/>
-          <p:cNvSpPr txBox="1"/>
-          <p:nvPr/>
-        </p:nvSpPr>
-        <p:spPr>
-          <a:xfrm>
-            <a:off x="914400" y="3236976"/>
-            <a:ext cx="9418320" cy="877824"/>
+          <p:cNvPr id="11" name="Text 9"/>
+          <p:cNvSpPr txBox="1"/>
+          <p:nvPr/>
+        </p:nvSpPr>
+        <p:spPr>
+          <a:xfrm>
+            <a:off x="6537960" y="2011680"/>
+            <a:ext cx="4754880" cy="365760"/>
           </a:xfrm>
           <a:prstGeom prst="rect">
             <a:avLst/>
@@ -4176,23 +4561,62 @@
           <a:lstStyle/>
           <a:p>
             <a:pPr indent="0" marL="0">
-              <a:lnSpc>
-                <a:spcPct val="118000"/>
-              </a:lnSpc>
-              <a:buNone/>
-            </a:pPr>
-            <a:r>
-              <a:rPr lang="en-US" sz="1700" dirty="0">
-                <a:solidFill>
-                  <a:srgbClr val="101828"/>
+              <a:buNone/>
+            </a:pPr>
+            <a:r>
+              <a:rPr lang="en-US" sz="1600" b="1" dirty="0">
+                <a:solidFill>
+                  <a:srgbClr val="08A6A6"/>
                 </a:solidFill>
                 <a:latin typeface="IBM Plex Sans" pitchFamily="34" charset="0"/>
                 <a:ea typeface="IBM Plex Sans" pitchFamily="34" charset="-122"/>
                 <a:cs typeface="IBM Plex Sans" pitchFamily="34" charset="-120"/>
               </a:rPr>
-              <a:t>Write a program that reads eight whole numbers into a list, puts them in order smallest first with a bubble sort of your own, and prints the sorted list on one line.</a:t>
-            </a:r>
-            <a:endParaRPr lang="en-US" sz="1700" dirty="0"/>
+              <a:t>Whole middles only</a:t>
+            </a:r>
+            <a:endParaRPr lang="en-US" sz="1600" dirty="0"/>
+          </a:p>
+        </p:txBody>
+      </p:sp>
+      <p:sp>
+        <p:nvSpPr>
+          <p:cNvPr id="12" name="Text 10"/>
+          <p:cNvSpPr txBox="1"/>
+          <p:nvPr/>
+        </p:nvSpPr>
+        <p:spPr>
+          <a:xfrm>
+            <a:off x="6537960" y="2395728"/>
+            <a:ext cx="4754880" cy="1005840"/>
+          </a:xfrm>
+          <a:prstGeom prst="rect">
+            <a:avLst/>
+          </a:prstGeom>
+          <a:noFill/>
+          <a:ln/>
+        </p:spPr>
+        <p:txBody>
+          <a:bodyPr wrap="square" lIns="0" tIns="0" rIns="0" bIns="0" rtlCol="0" anchor="t"/>
+          <a:lstStyle/>
+          <a:p>
+            <a:pPr indent="0" marL="0">
+              <a:lnSpc>
+                <a:spcPct val="120000"/>
+              </a:lnSpc>
+              <a:buNone/>
+            </a:pPr>
+            <a:r>
+              <a:rPr lang="en-US" sz="1300" dirty="0">
+                <a:solidFill>
+                  <a:srgbClr val="667085"/>
+                </a:solidFill>
+                <a:latin typeface="IBM Plex Sans" pitchFamily="34" charset="0"/>
+                <a:ea typeface="IBM Plex Sans" pitchFamily="34" charset="-122"/>
+                <a:cs typeface="IBM Plex Sans" pitchFamily="34" charset="-120"/>
+              </a:rPr>
+              <a:t>mid = (low + high) // 2 uses // so the middle is a whole number: a list index can never be 3.5.</a:t>
+            </a:r>
+            <a:endParaRPr lang="en-US" sz="1300" dirty="0"/>
           </a:p>
         </p:txBody>
       </p:sp>
@@ -4204,73 +4628,12 @@
         </p:nvSpPr>
         <p:spPr>
           <a:xfrm>
-            <a:off x="10515600" y="3429000"/>
-            <a:ext cx="868680" cy="493776"/>
+            <a:off x="502920" y="3794760"/>
+            <a:ext cx="5394960" cy="1737360"/>
           </a:xfrm>
           <a:prstGeom prst="roundRect">
             <a:avLst>
-              <a:gd name="adj" fmla="val 18519"/>
-            </a:avLst>
-          </a:prstGeom>
-          <a:solidFill>
-            <a:srgbClr val="EEF2FB"/>
-          </a:solidFill>
-          <a:ln/>
-        </p:spPr>
-      </p:sp>
-      <p:sp>
-        <p:nvSpPr>
-          <p:cNvPr id="14" name="Text 12"/>
-          <p:cNvSpPr txBox="1"/>
-          <p:nvPr/>
-        </p:nvSpPr>
-        <p:spPr>
-          <a:xfrm>
-            <a:off x="10515600" y="3429000"/>
-            <a:ext cx="868680" cy="493776"/>
-          </a:xfrm>
-          <a:prstGeom prst="rect">
-            <a:avLst/>
-          </a:prstGeom>
-          <a:noFill/>
-          <a:ln/>
-        </p:spPr>
-        <p:txBody>
-          <a:bodyPr wrap="square" lIns="0" tIns="0" rIns="0" bIns="0" rtlCol="0" anchor="ctr"/>
-          <a:lstStyle/>
-          <a:p>
-            <a:pPr algn="ctr" indent="0" marL="0">
-              <a:buNone/>
-            </a:pPr>
-            <a:r>
-              <a:rPr lang="en-US" sz="1500" b="1" dirty="0">
-                <a:solidFill>
-                  <a:srgbClr val="2D63FF"/>
-                </a:solidFill>
-                <a:latin typeface="IBM Plex Mono" pitchFamily="34" charset="0"/>
-                <a:ea typeface="IBM Plex Mono" pitchFamily="34" charset="-122"/>
-                <a:cs typeface="IBM Plex Mono" pitchFamily="34" charset="-120"/>
-              </a:rPr>
-              <a:t>[6]</a:t>
-            </a:r>
-            <a:endParaRPr lang="en-US" sz="1500" dirty="0"/>
-          </a:p>
-        </p:txBody>
-      </p:sp>
-      <p:sp>
-        <p:nvSpPr>
-          <p:cNvPr id="15" name="Shape 13"/>
-          <p:cNvSpPr/>
-          <p:nvPr/>
-        </p:nvSpPr>
-        <p:spPr>
-          <a:xfrm>
-            <a:off x="502920" y="4425696"/>
-            <a:ext cx="11155680" cy="1097280"/>
-          </a:xfrm>
-          <a:prstGeom prst="roundRect">
-            <a:avLst>
-              <a:gd name="adj" fmla="val 10000"/>
+              <a:gd name="adj" fmla="val 6316"/>
             </a:avLst>
           </a:prstGeom>
           <a:solidFill>
@@ -4278,7 +4641,7 @@
           </a:solidFill>
           <a:ln w="15875">
             <a:solidFill>
-              <a:srgbClr val="D9DEE7"/>
+              <a:srgbClr val="2D63FF"/>
             </a:solidFill>
             <a:prstDash val="solid"/>
           </a:ln>
@@ -4286,14 +4649,14 @@
       </p:sp>
       <p:sp>
         <p:nvSpPr>
-          <p:cNvPr id="16" name="Text 14"/>
-          <p:cNvSpPr txBox="1"/>
-          <p:nvPr/>
-        </p:nvSpPr>
-        <p:spPr>
-          <a:xfrm>
-            <a:off x="914400" y="4535424"/>
-            <a:ext cx="9418320" cy="877824"/>
+          <p:cNvPr id="14" name="Text 12"/>
+          <p:cNvSpPr txBox="1"/>
+          <p:nvPr/>
+        </p:nvSpPr>
+        <p:spPr>
+          <a:xfrm>
+            <a:off x="822960" y="3977640"/>
+            <a:ext cx="4754880" cy="365760"/>
           </a:xfrm>
           <a:prstGeom prst="rect">
             <a:avLst/>
@@ -4306,47 +4669,130 @@
           <a:lstStyle/>
           <a:p>
             <a:pPr indent="0" marL="0">
-              <a:lnSpc>
-                <a:spcPct val="118000"/>
-              </a:lnSpc>
-              <a:buNone/>
-            </a:pPr>
-            <a:r>
-              <a:rPr lang="en-US" sz="1700" dirty="0">
-                <a:solidFill>
-                  <a:srgbClr val="101828"/>
+              <a:buNone/>
+            </a:pPr>
+            <a:r>
+              <a:rPr lang="en-US" sz="1600" b="1" dirty="0">
+                <a:solidFill>
+                  <a:srgbClr val="2D63FF"/>
                 </a:solidFill>
                 <a:latin typeface="IBM Plex Sans" pitchFamily="34" charset="0"/>
                 <a:ea typeface="IBM Plex Sans" pitchFamily="34" charset="-122"/>
                 <a:cs typeface="IBM Plex Sans" pitchFamily="34" charset="-120"/>
               </a:rPr>
-              <a:t>Write a program that reads a whole number and finds it in a list of ten numbers that is already in order, using a binary search, and prints its position or Not found.</a:t>
-            </a:r>
-            <a:endParaRPr lang="en-US" sz="1700" dirty="0"/>
-          </a:p>
-        </p:txBody>
-      </p:sp>
-      <p:sp>
-        <p:nvSpPr>
-          <p:cNvPr id="17" name="Shape 15"/>
+              <a:t>Swapping in one line</a:t>
+            </a:r>
+            <a:endParaRPr lang="en-US" sz="1600" dirty="0"/>
+          </a:p>
+        </p:txBody>
+      </p:sp>
+      <p:sp>
+        <p:nvSpPr>
+          <p:cNvPr id="15" name="Text 13"/>
+          <p:cNvSpPr txBox="1"/>
+          <p:nvPr/>
+        </p:nvSpPr>
+        <p:spPr>
+          <a:xfrm>
+            <a:off x="822960" y="4361688"/>
+            <a:ext cx="4754880" cy="1005840"/>
+          </a:xfrm>
+          <a:prstGeom prst="rect">
+            <a:avLst/>
+          </a:prstGeom>
+          <a:noFill/>
+          <a:ln/>
+        </p:spPr>
+        <p:txBody>
+          <a:bodyPr wrap="square" lIns="0" tIns="0" rIns="0" bIns="0" rtlCol="0" anchor="t"/>
+          <a:lstStyle/>
+          <a:p>
+            <a:pPr indent="0" marL="0">
+              <a:lnSpc>
+                <a:spcPct val="120000"/>
+              </a:lnSpc>
+              <a:buNone/>
+            </a:pPr>
+            <a:r>
+              <a:rPr lang="en-US" sz="1300" dirty="0">
+                <a:solidFill>
+                  <a:srgbClr val="667085"/>
+                </a:solidFill>
+                <a:latin typeface="IBM Plex Sans" pitchFamily="34" charset="0"/>
+                <a:ea typeface="IBM Plex Sans" pitchFamily="34" charset="-122"/>
+                <a:cs typeface="IBM Plex Sans" pitchFamily="34" charset="-120"/>
+              </a:rPr>
+              <a:t>Python can swap two values in one line with a, b = b, a. Most languages need a third variable to hold one of them.</a:t>
+            </a:r>
+            <a:endParaRPr lang="en-US" sz="1300" dirty="0"/>
+          </a:p>
+        </p:txBody>
+      </p:sp>
+      <p:sp>
+        <p:nvSpPr>
+          <p:cNvPr id="16" name="Shape 14"/>
           <p:cNvSpPr/>
           <p:nvPr/>
         </p:nvSpPr>
         <p:spPr>
           <a:xfrm>
-            <a:off x="10515600" y="4727448"/>
-            <a:ext cx="868680" cy="493776"/>
+            <a:off x="6217920" y="3794760"/>
+            <a:ext cx="5394960" cy="1737360"/>
           </a:xfrm>
           <a:prstGeom prst="roundRect">
             <a:avLst>
-              <a:gd name="adj" fmla="val 18519"/>
+              <a:gd name="adj" fmla="val 6316"/>
             </a:avLst>
           </a:prstGeom>
           <a:solidFill>
-            <a:srgbClr val="EEF2FB"/>
+            <a:srgbClr val="FFFFFF"/>
           </a:solidFill>
-          <a:ln/>
-        </p:spPr>
+          <a:ln w="15875">
+            <a:solidFill>
+              <a:srgbClr val="08A6A6"/>
+            </a:solidFill>
+            <a:prstDash val="solid"/>
+          </a:ln>
+        </p:spPr>
+      </p:sp>
+      <p:sp>
+        <p:nvSpPr>
+          <p:cNvPr id="17" name="Text 15"/>
+          <p:cNvSpPr txBox="1"/>
+          <p:nvPr/>
+        </p:nvSpPr>
+        <p:spPr>
+          <a:xfrm>
+            <a:off x="6537960" y="3977640"/>
+            <a:ext cx="4754880" cy="365760"/>
+          </a:xfrm>
+          <a:prstGeom prst="rect">
+            <a:avLst/>
+          </a:prstGeom>
+          <a:noFill/>
+          <a:ln/>
+        </p:spPr>
+        <p:txBody>
+          <a:bodyPr wrap="square" lIns="0" tIns="0" rIns="0" bIns="0" rtlCol="0" anchor="ctr"/>
+          <a:lstStyle/>
+          <a:p>
+            <a:pPr indent="0" marL="0">
+              <a:buNone/>
+            </a:pPr>
+            <a:r>
+              <a:rPr lang="en-US" sz="1600" b="1" dirty="0">
+                <a:solidFill>
+                  <a:srgbClr val="08A6A6"/>
+                </a:solidFill>
+                <a:latin typeface="IBM Plex Sans" pitchFamily="34" charset="0"/>
+                <a:ea typeface="IBM Plex Sans" pitchFamily="34" charset="-122"/>
+                <a:cs typeface="IBM Plex Sans" pitchFamily="34" charset="-120"/>
+              </a:rPr>
+              <a:t>Nearly sorted</a:t>
+            </a:r>
+            <a:endParaRPr lang="en-US" sz="1600" dirty="0"/>
+          </a:p>
+        </p:txBody>
       </p:sp>
       <p:sp>
         <p:nvSpPr>
@@ -4356,34 +4802,37 @@
         </p:nvSpPr>
         <p:spPr>
           <a:xfrm>
-            <a:off x="10515600" y="4727448"/>
-            <a:ext cx="868680" cy="493776"/>
-          </a:xfrm>
-          <a:prstGeom prst="rect">
-            <a:avLst/>
-          </a:prstGeom>
-          <a:noFill/>
-          <a:ln/>
-        </p:spPr>
-        <p:txBody>
-          <a:bodyPr wrap="square" lIns="0" tIns="0" rIns="0" bIns="0" rtlCol="0" anchor="ctr"/>
-          <a:lstStyle/>
-          <a:p>
-            <a:pPr algn="ctr" indent="0" marL="0">
-              <a:buNone/>
-            </a:pPr>
-            <a:r>
-              <a:rPr lang="en-US" sz="1500" b="1" dirty="0">
-                <a:solidFill>
-                  <a:srgbClr val="2D63FF"/>
-                </a:solidFill>
-                <a:latin typeface="IBM Plex Mono" pitchFamily="34" charset="0"/>
-                <a:ea typeface="IBM Plex Mono" pitchFamily="34" charset="-122"/>
-                <a:cs typeface="IBM Plex Mono" pitchFamily="34" charset="-120"/>
-              </a:rPr>
-              <a:t>[6]</a:t>
-            </a:r>
-            <a:endParaRPr lang="en-US" sz="1500" dirty="0"/>
+            <a:off x="6537960" y="4361688"/>
+            <a:ext cx="4754880" cy="1005840"/>
+          </a:xfrm>
+          <a:prstGeom prst="rect">
+            <a:avLst/>
+          </a:prstGeom>
+          <a:noFill/>
+          <a:ln/>
+        </p:spPr>
+        <p:txBody>
+          <a:bodyPr wrap="square" lIns="0" tIns="0" rIns="0" bIns="0" rtlCol="0" anchor="t"/>
+          <a:lstStyle/>
+          <a:p>
+            <a:pPr indent="0" marL="0">
+              <a:lnSpc>
+                <a:spcPct val="120000"/>
+              </a:lnSpc>
+              <a:buNone/>
+            </a:pPr>
+            <a:r>
+              <a:rPr lang="en-US" sz="1300" dirty="0">
+                <a:solidFill>
+                  <a:srgbClr val="667085"/>
+                </a:solidFill>
+                <a:latin typeface="IBM Plex Sans" pitchFamily="34" charset="0"/>
+                <a:ea typeface="IBM Plex Sans" pitchFamily="34" charset="-122"/>
+                <a:cs typeface="IBM Plex Sans" pitchFamily="34" charset="-120"/>
+              </a:rPr>
+              <a:t>On a list that is almost in order an insertion sort is very quick, because hardly anything has to move. The same code sorts words as well as numbers, because &gt; compares two strings by character code.</a:t>
+            </a:r>
+            <a:endParaRPr lang="en-US" sz="1300" dirty="0"/>
           </a:p>
         </p:txBody>
       </p:sp>
@@ -4398,6 +4847,604 @@
 <file path=ppt/slides/slide14.xml><?xml version="1.0" encoding="utf-8"?>
 <p:sld xmlns:a="http://schemas.openxmlformats.org/drawingml/2006/main" xmlns:r="http://schemas.openxmlformats.org/officeDocument/2006/relationships" xmlns:p="http://schemas.openxmlformats.org/presentationml/2006/main">
   <p:cSld name="Slide 14">
+    <p:bg>
+      <p:bgPr>
+        <a:solidFill>
+          <a:srgbClr val="F7F7F4"/>
+        </a:solidFill>
+      </p:bgPr>
+    </p:bg>
+    <p:spTree>
+      <p:nvGrpSpPr>
+        <p:cNvPr id="1" name=""/>
+        <p:cNvGrpSpPr/>
+        <p:nvPr/>
+      </p:nvGrpSpPr>
+      <p:grpSpPr>
+        <a:xfrm>
+          <a:off x="0" y="0"/>
+          <a:ext cx="0" cy="0"/>
+          <a:chOff x="0" y="0"/>
+          <a:chExt cx="0" cy="0"/>
+        </a:xfrm>
+      </p:grpSpPr>
+      <p:sp>
+        <p:nvSpPr>
+          <p:cNvPr id="2" name="Shape 0"/>
+          <p:cNvSpPr/>
+          <p:nvPr/>
+        </p:nvSpPr>
+        <p:spPr>
+          <a:xfrm>
+            <a:off x="0" y="0"/>
+            <a:ext cx="12188952" cy="82296"/>
+          </a:xfrm>
+          <a:prstGeom prst="rect">
+            <a:avLst/>
+          </a:prstGeom>
+          <a:solidFill>
+            <a:srgbClr val="2D63FF"/>
+          </a:solidFill>
+          <a:ln/>
+        </p:spPr>
+      </p:sp>
+      <p:sp>
+        <p:nvSpPr>
+          <p:cNvPr id="3" name="Text 1"/>
+          <p:cNvSpPr txBox="1"/>
+          <p:nvPr/>
+        </p:nvSpPr>
+        <p:spPr>
+          <a:xfrm>
+            <a:off x="502920" y="6236208"/>
+            <a:ext cx="7772400" cy="365760"/>
+          </a:xfrm>
+          <a:prstGeom prst="rect">
+            <a:avLst/>
+          </a:prstGeom>
+          <a:noFill/>
+          <a:ln/>
+        </p:spPr>
+        <p:txBody>
+          <a:bodyPr wrap="square" lIns="0" tIns="0" rIns="0" bIns="0" rtlCol="0" anchor="ctr"/>
+          <a:lstStyle/>
+          <a:p>
+            <a:pPr indent="0" marL="0">
+              <a:buNone/>
+            </a:pPr>
+            <a:r>
+              <a:rPr lang="en-US" sz="1100" dirty="0">
+                <a:solidFill>
+                  <a:srgbClr val="667085"/>
+                </a:solidFill>
+                <a:latin typeface="IBM Plex Mono" pitchFamily="34" charset="0"/>
+                <a:ea typeface="IBM Plex Mono" pitchFamily="34" charset="-122"/>
+                <a:cs typeface="IBM Plex Mono" pitchFamily="34" charset="-120"/>
+              </a:rPr>
+              <a:t>Python programming  |  Lesson 11</a:t>
+            </a:r>
+            <a:endParaRPr lang="en-US" sz="1100" dirty="0"/>
+          </a:p>
+        </p:txBody>
+      </p:sp>
+      <p:sp>
+        <p:nvSpPr>
+          <p:cNvPr id="4" name="Text 2"/>
+          <p:cNvSpPr txBox="1"/>
+          <p:nvPr/>
+        </p:nvSpPr>
+        <p:spPr>
+          <a:xfrm>
+            <a:off x="9326880" y="6236208"/>
+            <a:ext cx="2377440" cy="365760"/>
+          </a:xfrm>
+          <a:prstGeom prst="rect">
+            <a:avLst/>
+          </a:prstGeom>
+          <a:noFill/>
+          <a:ln/>
+        </p:spPr>
+        <p:txBody>
+          <a:bodyPr wrap="square" lIns="0" tIns="0" rIns="0" bIns="0" rtlCol="0" anchor="ctr"/>
+          <a:lstStyle/>
+          <a:p>
+            <a:pPr algn="r" indent="0" marL="0">
+              <a:buNone/>
+            </a:pPr>
+            <a:r>
+              <a:rPr lang="en-US" sz="1100" dirty="0">
+                <a:solidFill>
+                  <a:srgbClr val="667085"/>
+                </a:solidFill>
+                <a:latin typeface="IBM Plex Mono" pitchFamily="34" charset="0"/>
+                <a:ea typeface="IBM Plex Mono" pitchFamily="34" charset="-122"/>
+                <a:cs typeface="IBM Plex Mono" pitchFamily="34" charset="-120"/>
+              </a:rPr>
+              <a:t>Revise 360</a:t>
+            </a:r>
+            <a:endParaRPr lang="en-US" sz="1100" dirty="0"/>
+          </a:p>
+        </p:txBody>
+      </p:sp>
+      <p:sp>
+        <p:nvSpPr>
+          <p:cNvPr id="5" name="Text 3"/>
+          <p:cNvSpPr txBox="1"/>
+          <p:nvPr/>
+        </p:nvSpPr>
+        <p:spPr>
+          <a:xfrm>
+            <a:off x="502920" y="411480"/>
+            <a:ext cx="11155680" cy="777240"/>
+          </a:xfrm>
+          <a:prstGeom prst="rect">
+            <a:avLst/>
+          </a:prstGeom>
+          <a:noFill/>
+          <a:ln/>
+        </p:spPr>
+        <p:txBody>
+          <a:bodyPr wrap="square" lIns="0" tIns="0" rIns="0" bIns="0" rtlCol="0" anchor="ctr"/>
+          <a:lstStyle/>
+          <a:p>
+            <a:pPr indent="0" marL="0">
+              <a:buNone/>
+            </a:pPr>
+            <a:r>
+              <a:rPr lang="en-US" sz="3200" b="1" dirty="0">
+                <a:solidFill>
+                  <a:srgbClr val="101828"/>
+                </a:solidFill>
+                <a:latin typeface="IBM Plex Sans" pitchFamily="34" charset="0"/>
+                <a:ea typeface="IBM Plex Sans" pitchFamily="34" charset="-122"/>
+                <a:cs typeface="IBM Plex Sans" pitchFamily="34" charset="-120"/>
+              </a:rPr>
+              <a:t>Exam practice</a:t>
+            </a:r>
+            <a:endParaRPr lang="en-US" sz="3200" dirty="0"/>
+          </a:p>
+        </p:txBody>
+      </p:sp>
+      <p:sp>
+        <p:nvSpPr>
+          <p:cNvPr id="6" name="Text 4"/>
+          <p:cNvSpPr txBox="1"/>
+          <p:nvPr/>
+        </p:nvSpPr>
+        <p:spPr>
+          <a:xfrm>
+            <a:off x="502920" y="1170432"/>
+            <a:ext cx="11155680" cy="411480"/>
+          </a:xfrm>
+          <a:prstGeom prst="rect">
+            <a:avLst/>
+          </a:prstGeom>
+          <a:noFill/>
+          <a:ln/>
+        </p:spPr>
+        <p:txBody>
+          <a:bodyPr wrap="square" lIns="0" tIns="0" rIns="0" bIns="0" rtlCol="0" anchor="ctr"/>
+          <a:lstStyle/>
+          <a:p>
+            <a:pPr indent="0" marL="0">
+              <a:buNone/>
+            </a:pPr>
+            <a:r>
+              <a:rPr lang="en-US" sz="1500" dirty="0">
+                <a:solidFill>
+                  <a:srgbClr val="667085"/>
+                </a:solidFill>
+                <a:latin typeface="IBM Plex Sans" pitchFamily="34" charset="0"/>
+                <a:ea typeface="IBM Plex Sans" pitchFamily="34" charset="-122"/>
+                <a:cs typeface="IBM Plex Sans" pitchFamily="34" charset="-120"/>
+              </a:rPr>
+              <a:t>Devices away. Answer from memory on the worksheet.</a:t>
+            </a:r>
+            <a:endParaRPr lang="en-US" sz="1500" dirty="0"/>
+          </a:p>
+        </p:txBody>
+      </p:sp>
+      <p:sp>
+        <p:nvSpPr>
+          <p:cNvPr id="7" name="Shape 5"/>
+          <p:cNvSpPr/>
+          <p:nvPr/>
+        </p:nvSpPr>
+        <p:spPr>
+          <a:xfrm>
+            <a:off x="502920" y="1828800"/>
+            <a:ext cx="11155680" cy="1097280"/>
+          </a:xfrm>
+          <a:prstGeom prst="roundRect">
+            <a:avLst>
+              <a:gd name="adj" fmla="val 10000"/>
+            </a:avLst>
+          </a:prstGeom>
+          <a:solidFill>
+            <a:srgbClr val="FFFFFF"/>
+          </a:solidFill>
+          <a:ln w="15875">
+            <a:solidFill>
+              <a:srgbClr val="D9DEE7"/>
+            </a:solidFill>
+            <a:prstDash val="solid"/>
+          </a:ln>
+        </p:spPr>
+      </p:sp>
+      <p:sp>
+        <p:nvSpPr>
+          <p:cNvPr id="8" name="Text 6"/>
+          <p:cNvSpPr txBox="1"/>
+          <p:nvPr/>
+        </p:nvSpPr>
+        <p:spPr>
+          <a:xfrm>
+            <a:off x="914400" y="1938528"/>
+            <a:ext cx="9418320" cy="877824"/>
+          </a:xfrm>
+          <a:prstGeom prst="rect">
+            <a:avLst/>
+          </a:prstGeom>
+          <a:noFill/>
+          <a:ln/>
+        </p:spPr>
+        <p:txBody>
+          <a:bodyPr wrap="square" lIns="0" tIns="0" rIns="0" bIns="0" rtlCol="0" anchor="ctr"/>
+          <a:lstStyle/>
+          <a:p>
+            <a:pPr indent="0" marL="0">
+              <a:lnSpc>
+                <a:spcPct val="118000"/>
+              </a:lnSpc>
+              <a:buNone/>
+            </a:pPr>
+            <a:r>
+              <a:rPr lang="en-US" sz="1700" dirty="0">
+                <a:solidFill>
+                  <a:srgbClr val="101828"/>
+                </a:solidFill>
+                <a:latin typeface="IBM Plex Sans" pitchFamily="34" charset="0"/>
+                <a:ea typeface="IBM Plex Sans" pitchFamily="34" charset="-122"/>
+                <a:cs typeface="IBM Plex Sans" pitchFamily="34" charset="-120"/>
+              </a:rPr>
+              <a:t>A linear search prints Not found from inside its loop, so one search prints that message several times. State where the message should go instead, and explain why putting it there fixes the problem.</a:t>
+            </a:r>
+            <a:endParaRPr lang="en-US" sz="1700" dirty="0"/>
+          </a:p>
+        </p:txBody>
+      </p:sp>
+      <p:sp>
+        <p:nvSpPr>
+          <p:cNvPr id="9" name="Shape 7"/>
+          <p:cNvSpPr/>
+          <p:nvPr/>
+        </p:nvSpPr>
+        <p:spPr>
+          <a:xfrm>
+            <a:off x="10515600" y="2130552"/>
+            <a:ext cx="868680" cy="493776"/>
+          </a:xfrm>
+          <a:prstGeom prst="roundRect">
+            <a:avLst>
+              <a:gd name="adj" fmla="val 18519"/>
+            </a:avLst>
+          </a:prstGeom>
+          <a:solidFill>
+            <a:srgbClr val="EEF2FB"/>
+          </a:solidFill>
+          <a:ln/>
+        </p:spPr>
+      </p:sp>
+      <p:sp>
+        <p:nvSpPr>
+          <p:cNvPr id="10" name="Text 8"/>
+          <p:cNvSpPr txBox="1"/>
+          <p:nvPr/>
+        </p:nvSpPr>
+        <p:spPr>
+          <a:xfrm>
+            <a:off x="10515600" y="2130552"/>
+            <a:ext cx="868680" cy="493776"/>
+          </a:xfrm>
+          <a:prstGeom prst="rect">
+            <a:avLst/>
+          </a:prstGeom>
+          <a:noFill/>
+          <a:ln/>
+        </p:spPr>
+        <p:txBody>
+          <a:bodyPr wrap="square" lIns="0" tIns="0" rIns="0" bIns="0" rtlCol="0" anchor="ctr"/>
+          <a:lstStyle/>
+          <a:p>
+            <a:pPr algn="ctr" indent="0" marL="0">
+              <a:buNone/>
+            </a:pPr>
+            <a:r>
+              <a:rPr lang="en-US" sz="1500" b="1" dirty="0">
+                <a:solidFill>
+                  <a:srgbClr val="2D63FF"/>
+                </a:solidFill>
+                <a:latin typeface="IBM Plex Mono" pitchFamily="34" charset="0"/>
+                <a:ea typeface="IBM Plex Mono" pitchFamily="34" charset="-122"/>
+                <a:cs typeface="IBM Plex Mono" pitchFamily="34" charset="-120"/>
+              </a:rPr>
+              <a:t>[3]</a:t>
+            </a:r>
+            <a:endParaRPr lang="en-US" sz="1500" dirty="0"/>
+          </a:p>
+        </p:txBody>
+      </p:sp>
+      <p:sp>
+        <p:nvSpPr>
+          <p:cNvPr id="11" name="Shape 9"/>
+          <p:cNvSpPr/>
+          <p:nvPr/>
+        </p:nvSpPr>
+        <p:spPr>
+          <a:xfrm>
+            <a:off x="502920" y="3127248"/>
+            <a:ext cx="11155680" cy="1097280"/>
+          </a:xfrm>
+          <a:prstGeom prst="roundRect">
+            <a:avLst>
+              <a:gd name="adj" fmla="val 10000"/>
+            </a:avLst>
+          </a:prstGeom>
+          <a:solidFill>
+            <a:srgbClr val="FFFFFF"/>
+          </a:solidFill>
+          <a:ln w="15875">
+            <a:solidFill>
+              <a:srgbClr val="D9DEE7"/>
+            </a:solidFill>
+            <a:prstDash val="solid"/>
+          </a:ln>
+        </p:spPr>
+      </p:sp>
+      <p:sp>
+        <p:nvSpPr>
+          <p:cNvPr id="12" name="Text 10"/>
+          <p:cNvSpPr txBox="1"/>
+          <p:nvPr/>
+        </p:nvSpPr>
+        <p:spPr>
+          <a:xfrm>
+            <a:off x="914400" y="3236976"/>
+            <a:ext cx="9418320" cy="877824"/>
+          </a:xfrm>
+          <a:prstGeom prst="rect">
+            <a:avLst/>
+          </a:prstGeom>
+          <a:noFill/>
+          <a:ln/>
+        </p:spPr>
+        <p:txBody>
+          <a:bodyPr wrap="square" lIns="0" tIns="0" rIns="0" bIns="0" rtlCol="0" anchor="ctr"/>
+          <a:lstStyle/>
+          <a:p>
+            <a:pPr indent="0" marL="0">
+              <a:lnSpc>
+                <a:spcPct val="118000"/>
+              </a:lnSpc>
+              <a:buNone/>
+            </a:pPr>
+            <a:r>
+              <a:rPr lang="en-US" sz="1700" dirty="0">
+                <a:solidFill>
+                  <a:srgbClr val="101828"/>
+                </a:solidFill>
+                <a:latin typeface="IBM Plex Sans" pitchFamily="34" charset="0"/>
+                <a:ea typeface="IBM Plex Sans" pitchFamily="34" charset="-122"/>
+                <a:cs typeface="IBM Plex Sans" pitchFamily="34" charset="-120"/>
+              </a:rPr>
+              <a:t>Write a program that reads eight whole numbers into a list, puts them in order smallest first with a bubble sort of your own, and prints the sorted list on one line.</a:t>
+            </a:r>
+            <a:endParaRPr lang="en-US" sz="1700" dirty="0"/>
+          </a:p>
+        </p:txBody>
+      </p:sp>
+      <p:sp>
+        <p:nvSpPr>
+          <p:cNvPr id="13" name="Shape 11"/>
+          <p:cNvSpPr/>
+          <p:nvPr/>
+        </p:nvSpPr>
+        <p:spPr>
+          <a:xfrm>
+            <a:off x="10515600" y="3429000"/>
+            <a:ext cx="868680" cy="493776"/>
+          </a:xfrm>
+          <a:prstGeom prst="roundRect">
+            <a:avLst>
+              <a:gd name="adj" fmla="val 18519"/>
+            </a:avLst>
+          </a:prstGeom>
+          <a:solidFill>
+            <a:srgbClr val="EEF2FB"/>
+          </a:solidFill>
+          <a:ln/>
+        </p:spPr>
+      </p:sp>
+      <p:sp>
+        <p:nvSpPr>
+          <p:cNvPr id="14" name="Text 12"/>
+          <p:cNvSpPr txBox="1"/>
+          <p:nvPr/>
+        </p:nvSpPr>
+        <p:spPr>
+          <a:xfrm>
+            <a:off x="10515600" y="3429000"/>
+            <a:ext cx="868680" cy="493776"/>
+          </a:xfrm>
+          <a:prstGeom prst="rect">
+            <a:avLst/>
+          </a:prstGeom>
+          <a:noFill/>
+          <a:ln/>
+        </p:spPr>
+        <p:txBody>
+          <a:bodyPr wrap="square" lIns="0" tIns="0" rIns="0" bIns="0" rtlCol="0" anchor="ctr"/>
+          <a:lstStyle/>
+          <a:p>
+            <a:pPr algn="ctr" indent="0" marL="0">
+              <a:buNone/>
+            </a:pPr>
+            <a:r>
+              <a:rPr lang="en-US" sz="1500" b="1" dirty="0">
+                <a:solidFill>
+                  <a:srgbClr val="2D63FF"/>
+                </a:solidFill>
+                <a:latin typeface="IBM Plex Mono" pitchFamily="34" charset="0"/>
+                <a:ea typeface="IBM Plex Mono" pitchFamily="34" charset="-122"/>
+                <a:cs typeface="IBM Plex Mono" pitchFamily="34" charset="-120"/>
+              </a:rPr>
+              <a:t>[6]</a:t>
+            </a:r>
+            <a:endParaRPr lang="en-US" sz="1500" dirty="0"/>
+          </a:p>
+        </p:txBody>
+      </p:sp>
+      <p:sp>
+        <p:nvSpPr>
+          <p:cNvPr id="15" name="Shape 13"/>
+          <p:cNvSpPr/>
+          <p:nvPr/>
+        </p:nvSpPr>
+        <p:spPr>
+          <a:xfrm>
+            <a:off x="502920" y="4425696"/>
+            <a:ext cx="11155680" cy="1097280"/>
+          </a:xfrm>
+          <a:prstGeom prst="roundRect">
+            <a:avLst>
+              <a:gd name="adj" fmla="val 10000"/>
+            </a:avLst>
+          </a:prstGeom>
+          <a:solidFill>
+            <a:srgbClr val="FFFFFF"/>
+          </a:solidFill>
+          <a:ln w="15875">
+            <a:solidFill>
+              <a:srgbClr val="D9DEE7"/>
+            </a:solidFill>
+            <a:prstDash val="solid"/>
+          </a:ln>
+        </p:spPr>
+      </p:sp>
+      <p:sp>
+        <p:nvSpPr>
+          <p:cNvPr id="16" name="Text 14"/>
+          <p:cNvSpPr txBox="1"/>
+          <p:nvPr/>
+        </p:nvSpPr>
+        <p:spPr>
+          <a:xfrm>
+            <a:off x="914400" y="4535424"/>
+            <a:ext cx="9418320" cy="877824"/>
+          </a:xfrm>
+          <a:prstGeom prst="rect">
+            <a:avLst/>
+          </a:prstGeom>
+          <a:noFill/>
+          <a:ln/>
+        </p:spPr>
+        <p:txBody>
+          <a:bodyPr wrap="square" lIns="0" tIns="0" rIns="0" bIns="0" rtlCol="0" anchor="ctr"/>
+          <a:lstStyle/>
+          <a:p>
+            <a:pPr indent="0" marL="0">
+              <a:lnSpc>
+                <a:spcPct val="118000"/>
+              </a:lnSpc>
+              <a:buNone/>
+            </a:pPr>
+            <a:r>
+              <a:rPr lang="en-US" sz="1700" dirty="0">
+                <a:solidFill>
+                  <a:srgbClr val="101828"/>
+                </a:solidFill>
+                <a:latin typeface="IBM Plex Sans" pitchFamily="34" charset="0"/>
+                <a:ea typeface="IBM Plex Sans" pitchFamily="34" charset="-122"/>
+                <a:cs typeface="IBM Plex Sans" pitchFamily="34" charset="-120"/>
+              </a:rPr>
+              <a:t>Write a program that reads a whole number and finds it in a list of ten numbers that is already in order, using a binary search, and prints its position or Not found.</a:t>
+            </a:r>
+            <a:endParaRPr lang="en-US" sz="1700" dirty="0"/>
+          </a:p>
+        </p:txBody>
+      </p:sp>
+      <p:sp>
+        <p:nvSpPr>
+          <p:cNvPr id="17" name="Shape 15"/>
+          <p:cNvSpPr/>
+          <p:nvPr/>
+        </p:nvSpPr>
+        <p:spPr>
+          <a:xfrm>
+            <a:off x="10515600" y="4727448"/>
+            <a:ext cx="868680" cy="493776"/>
+          </a:xfrm>
+          <a:prstGeom prst="roundRect">
+            <a:avLst>
+              <a:gd name="adj" fmla="val 18519"/>
+            </a:avLst>
+          </a:prstGeom>
+          <a:solidFill>
+            <a:srgbClr val="EEF2FB"/>
+          </a:solidFill>
+          <a:ln/>
+        </p:spPr>
+      </p:sp>
+      <p:sp>
+        <p:nvSpPr>
+          <p:cNvPr id="18" name="Text 16"/>
+          <p:cNvSpPr txBox="1"/>
+          <p:nvPr/>
+        </p:nvSpPr>
+        <p:spPr>
+          <a:xfrm>
+            <a:off x="10515600" y="4727448"/>
+            <a:ext cx="868680" cy="493776"/>
+          </a:xfrm>
+          <a:prstGeom prst="rect">
+            <a:avLst/>
+          </a:prstGeom>
+          <a:noFill/>
+          <a:ln/>
+        </p:spPr>
+        <p:txBody>
+          <a:bodyPr wrap="square" lIns="0" tIns="0" rIns="0" bIns="0" rtlCol="0" anchor="ctr"/>
+          <a:lstStyle/>
+          <a:p>
+            <a:pPr algn="ctr" indent="0" marL="0">
+              <a:buNone/>
+            </a:pPr>
+            <a:r>
+              <a:rPr lang="en-US" sz="1500" b="1" dirty="0">
+                <a:solidFill>
+                  <a:srgbClr val="2D63FF"/>
+                </a:solidFill>
+                <a:latin typeface="IBM Plex Mono" pitchFamily="34" charset="0"/>
+                <a:ea typeface="IBM Plex Mono" pitchFamily="34" charset="-122"/>
+                <a:cs typeface="IBM Plex Mono" pitchFamily="34" charset="-120"/>
+              </a:rPr>
+              <a:t>[6]</a:t>
+            </a:r>
+            <a:endParaRPr lang="en-US" sz="1500" dirty="0"/>
+          </a:p>
+        </p:txBody>
+      </p:sp>
+    </p:spTree>
+  </p:cSld>
+  <p:clrMapOvr>
+    <a:masterClrMapping/>
+  </p:clrMapOvr>
+</p:sld>
+</file>
+
+<file path=ppt/slides/slide15.xml><?xml version="1.0" encoding="utf-8"?>
+<p:sld xmlns:a="http://schemas.openxmlformats.org/drawingml/2006/main" xmlns:r="http://schemas.openxmlformats.org/officeDocument/2006/relationships" xmlns:p="http://schemas.openxmlformats.org/presentationml/2006/main">
+  <p:cSld name="Slide 15">
     <p:bg>
       <p:bgPr>
         <a:solidFill>
